--- a/public/lessons/year-6-maths/spring/week-13/simplify-before-multiplying/teaching-powerpoint-v1.pptx
+++ b/public/lessons/year-6-maths/spring/week-13/simplify-before-multiplying/teaching-powerpoint-v1.pptx
@@ -2,24 +2,24 @@
 <file path=ppt/presentation.xml><?xml version="1.0" encoding="utf-8"?>
 <p:presentation xmlns:p="http://schemas.openxmlformats.org/presentationml/2006/main">
   <p:sldMasterIdLst>
-    <p:sldMasterId xmlns:r="http://schemas.openxmlformats.org/officeDocument/2006/relationships" id="2147483648" r:id="Rb11501462433489d"/>
+    <p:sldMasterId xmlns:r="http://schemas.openxmlformats.org/officeDocument/2006/relationships" id="2147483648" r:id="R2d9ec71a136049ee"/>
   </p:sldMasterIdLst>
   <p:notesMasterIdLst>
-    <p:notesMasterId xmlns:r="http://schemas.openxmlformats.org/officeDocument/2006/relationships" r:id="R525d6f6a70f3427c"/>
+    <p:notesMasterId xmlns:r="http://schemas.openxmlformats.org/officeDocument/2006/relationships" r:id="R7df8504ce4c34ed8"/>
   </p:notesMasterIdLst>
   <p:sldIdLst>
-    <p:sldId xmlns:r="http://schemas.openxmlformats.org/officeDocument/2006/relationships" id="256" r:id="R9eadfc57d2814a4b"/>
-    <p:sldId xmlns:r="http://schemas.openxmlformats.org/officeDocument/2006/relationships" id="257" r:id="Reb65e567122348d4"/>
-    <p:sldId xmlns:r="http://schemas.openxmlformats.org/officeDocument/2006/relationships" id="258" r:id="R797aac61b7d84003"/>
-    <p:sldId xmlns:r="http://schemas.openxmlformats.org/officeDocument/2006/relationships" id="259" r:id="R0ff2e819174f4c87"/>
-    <p:sldId xmlns:r="http://schemas.openxmlformats.org/officeDocument/2006/relationships" id="260" r:id="R52eda05f059047d2"/>
-    <p:sldId xmlns:r="http://schemas.openxmlformats.org/officeDocument/2006/relationships" id="261" r:id="R0954eb783eb44e00"/>
-    <p:sldId xmlns:r="http://schemas.openxmlformats.org/officeDocument/2006/relationships" id="262" r:id="R4209f88da2a74dcf"/>
-    <p:sldId xmlns:r="http://schemas.openxmlformats.org/officeDocument/2006/relationships" id="263" r:id="R5a862e01bf8c46b9"/>
-    <p:sldId xmlns:r="http://schemas.openxmlformats.org/officeDocument/2006/relationships" id="264" r:id="R80a0b619c7704e00"/>
-    <p:sldId xmlns:r="http://schemas.openxmlformats.org/officeDocument/2006/relationships" id="265" r:id="R96a8f62bfa26432e"/>
-    <p:sldId xmlns:r="http://schemas.openxmlformats.org/officeDocument/2006/relationships" id="266" r:id="R2b5c900e28da45f6"/>
-    <p:sldId xmlns:r="http://schemas.openxmlformats.org/officeDocument/2006/relationships" id="267" r:id="R22f58b1effe84836"/>
+    <p:sldId xmlns:r="http://schemas.openxmlformats.org/officeDocument/2006/relationships" id="256" r:id="R4dcbb37180d641df"/>
+    <p:sldId xmlns:r="http://schemas.openxmlformats.org/officeDocument/2006/relationships" id="257" r:id="R3140f40f46f846c6"/>
+    <p:sldId xmlns:r="http://schemas.openxmlformats.org/officeDocument/2006/relationships" id="258" r:id="Rb78b4a1d3bff4223"/>
+    <p:sldId xmlns:r="http://schemas.openxmlformats.org/officeDocument/2006/relationships" id="259" r:id="Rc733bed7603e45fd"/>
+    <p:sldId xmlns:r="http://schemas.openxmlformats.org/officeDocument/2006/relationships" id="260" r:id="R1ff60251c1c040b2"/>
+    <p:sldId xmlns:r="http://schemas.openxmlformats.org/officeDocument/2006/relationships" id="261" r:id="R69681f68dae046e2"/>
+    <p:sldId xmlns:r="http://schemas.openxmlformats.org/officeDocument/2006/relationships" id="262" r:id="R8928f07098b245ed"/>
+    <p:sldId xmlns:r="http://schemas.openxmlformats.org/officeDocument/2006/relationships" id="263" r:id="Ra009e0fc334547fc"/>
+    <p:sldId xmlns:r="http://schemas.openxmlformats.org/officeDocument/2006/relationships" id="264" r:id="R78fb4bb9271b4d6f"/>
+    <p:sldId xmlns:r="http://schemas.openxmlformats.org/officeDocument/2006/relationships" id="265" r:id="R7dc620f4466144f4"/>
+    <p:sldId xmlns:r="http://schemas.openxmlformats.org/officeDocument/2006/relationships" id="266" r:id="R1ffad22b905b48d7"/>
+    <p:sldId xmlns:r="http://schemas.openxmlformats.org/officeDocument/2006/relationships" id="267" r:id="R371b7e6fca82466e"/>
   </p:sldIdLst>
   <p:sldSz cx="12192000" cy="6858000"/>
   <p:notesSz cx="6858000" cy="9144000"/>
@@ -873,7 +873,7 @@
           <a:lstStyle xmlns:a="http://schemas.openxmlformats.org/drawingml/2006/main"/>
           <a:p xmlns:a="http://schemas.openxmlformats.org/drawingml/2006/main">
             <a:r>
-              <a:t>I do. Reveal the question, setup and each calculation stage one click at a time. Pupils watch before copying. Model answer: 3/5.</a:t>
+              <a:t>I do. Reveal the question, then reveal each mathematical change one click at a time. Point to the numbers and operation that changed before moving to the next line. Final answer: 3/5.</a:t>
             </a:r>
           </a:p>
         </p:txBody>
@@ -1291,7 +1291,7 @@
   </p:cSld>
   <p:clrMap bg1="lt1" tx1="dk1" bg2="lt2" tx2="dk2" accent1="accent1" accent2="accent2" accent3="accent3" accent4="accent4" accent5="accent5" accent6="accent6" hlink="hlink" folHlink="folHlink"/>
   <p:sldLayoutIdLst>
-    <p:sldLayoutId xmlns:r="http://schemas.openxmlformats.org/officeDocument/2006/relationships" id="2147483649" r:id="Rf3b66d5742704d32"/>
+    <p:sldLayoutId xmlns:r="http://schemas.openxmlformats.org/officeDocument/2006/relationships" id="2147483649" r:id="R32b6345f46ba4a24"/>
   </p:sldLayoutIdLst>
   <p:txStyles>
     <p:titleStyle>
@@ -1842,7 +1842,7 @@
           <p:cNvPr id="12" name="">
             <a:extLst xmlns:a="http://schemas.openxmlformats.org/drawingml/2006/main">
               <a:ext uri="{FF2B5EF4-FFF2-40B4-BE49-F238E27FC236}">
-                <a16:creationId xmlns:a16="http://schemas.microsoft.com/office/drawing/2014/main" id="{6D8DBE99-86E5-40A8-AD5C-768B7F4C69DF}"/>
+                <a16:creationId xmlns:a16="http://schemas.microsoft.com/office/drawing/2014/main" id="{1A057B98-F9D5-47C1-82C1-9BAD9CD47C44}"/>
               </a:ext>
             </a:extLst>
           </p:cNvPr>
@@ -1874,7 +1874,7 @@
           <p:cNvPr id="2" name="">
             <a:extLst xmlns:a="http://schemas.openxmlformats.org/drawingml/2006/main">
               <a:ext uri="{FF2B5EF4-FFF2-40B4-BE49-F238E27FC236}">
-                <a16:creationId xmlns:a16="http://schemas.microsoft.com/office/drawing/2014/main" id="{379185BE-7FCB-4DEB-9607-1A4775B17B53}"/>
+                <a16:creationId xmlns:a16="http://schemas.microsoft.com/office/drawing/2014/main" id="{A188F420-E1CD-4CBD-A538-95BEB560E962}"/>
               </a:ext>
             </a:extLst>
           </p:cNvPr>
@@ -1931,7 +1931,7 @@
           <p:cNvPr id="3" name="">
             <a:extLst xmlns:a="http://schemas.openxmlformats.org/drawingml/2006/main">
               <a:ext uri="{FF2B5EF4-FFF2-40B4-BE49-F238E27FC236}">
-                <a16:creationId xmlns:a16="http://schemas.microsoft.com/office/drawing/2014/main" id="{0C39DACC-368C-4A97-9183-92DBDA5FE3C7}"/>
+                <a16:creationId xmlns:a16="http://schemas.microsoft.com/office/drawing/2014/main" id="{6AA5E696-BCD6-4E78-952B-D1E3E57A1124}"/>
               </a:ext>
             </a:extLst>
           </p:cNvPr>
@@ -1965,7 +1965,7 @@
           <p:cNvPr id="4" name="">
             <a:extLst xmlns:a="http://schemas.openxmlformats.org/drawingml/2006/main">
               <a:ext uri="{FF2B5EF4-FFF2-40B4-BE49-F238E27FC236}">
-                <a16:creationId xmlns:a16="http://schemas.microsoft.com/office/drawing/2014/main" id="{D86AED92-5B42-42DA-B83C-951B9A3236F4}"/>
+                <a16:creationId xmlns:a16="http://schemas.microsoft.com/office/drawing/2014/main" id="{4AED5CCC-B3B1-4E12-B9BE-3F5893C3F8C8}"/>
               </a:ext>
             </a:extLst>
           </p:cNvPr>
@@ -2022,7 +2022,7 @@
           <p:cNvPr id="5" name="">
             <a:extLst xmlns:a="http://schemas.openxmlformats.org/drawingml/2006/main">
               <a:ext uri="{FF2B5EF4-FFF2-40B4-BE49-F238E27FC236}">
-                <a16:creationId xmlns:a16="http://schemas.microsoft.com/office/drawing/2014/main" id="{65D7FD00-5C64-4ECC-AAD2-3996252932C6}"/>
+                <a16:creationId xmlns:a16="http://schemas.microsoft.com/office/drawing/2014/main" id="{89BB1666-6560-4340-8A2F-EC5910A463BB}"/>
               </a:ext>
             </a:extLst>
           </p:cNvPr>
@@ -2079,7 +2079,7 @@
           <p:cNvPr id="6" name="">
             <a:extLst xmlns:a="http://schemas.openxmlformats.org/drawingml/2006/main">
               <a:ext uri="{FF2B5EF4-FFF2-40B4-BE49-F238E27FC236}">
-                <a16:creationId xmlns:a16="http://schemas.microsoft.com/office/drawing/2014/main" id="{7DAEC21E-49E9-4928-88D1-D55018CE1E3A}"/>
+                <a16:creationId xmlns:a16="http://schemas.microsoft.com/office/drawing/2014/main" id="{2E5FC879-2133-401D-B5F0-29D4ABCD9134}"/>
               </a:ext>
             </a:extLst>
           </p:cNvPr>
@@ -2113,7 +2113,7 @@
           <p:cNvPr id="7" name="">
             <a:extLst xmlns:a="http://schemas.openxmlformats.org/drawingml/2006/main">
               <a:ext uri="{FF2B5EF4-FFF2-40B4-BE49-F238E27FC236}">
-                <a16:creationId xmlns:a16="http://schemas.microsoft.com/office/drawing/2014/main" id="{3D59C5FD-599E-42AB-8004-821492574066}"/>
+                <a16:creationId xmlns:a16="http://schemas.microsoft.com/office/drawing/2014/main" id="{4DF13898-6FC1-41E1-AFCF-F0CC816EA540}"/>
               </a:ext>
             </a:extLst>
           </p:cNvPr>
@@ -2170,7 +2170,7 @@
           <p:cNvPr id="8" name="">
             <a:extLst xmlns:a="http://schemas.openxmlformats.org/drawingml/2006/main">
               <a:ext uri="{FF2B5EF4-FFF2-40B4-BE49-F238E27FC236}">
-                <a16:creationId xmlns:a16="http://schemas.microsoft.com/office/drawing/2014/main" id="{E78BBF69-81AC-4947-A52C-3FBCEC6E6D15}"/>
+                <a16:creationId xmlns:a16="http://schemas.microsoft.com/office/drawing/2014/main" id="{EE53A541-20D1-4692-89A9-104ADD68F055}"/>
               </a:ext>
             </a:extLst>
           </p:cNvPr>
@@ -2227,7 +2227,7 @@
           <p:cNvPr id="9" name="">
             <a:extLst xmlns:a="http://schemas.openxmlformats.org/drawingml/2006/main">
               <a:ext uri="{FF2B5EF4-FFF2-40B4-BE49-F238E27FC236}">
-                <a16:creationId xmlns:a16="http://schemas.microsoft.com/office/drawing/2014/main" id="{0FDA5BF4-72A0-4E5E-8261-21ED2BC0FF8B}"/>
+                <a16:creationId xmlns:a16="http://schemas.microsoft.com/office/drawing/2014/main" id="{0247069E-0E4A-4EC7-AFFE-10232B1181C2}"/>
               </a:ext>
             </a:extLst>
           </p:cNvPr>
@@ -2284,7 +2284,7 @@
           <p:cNvPr id="10" name="">
             <a:extLst xmlns:a="http://schemas.openxmlformats.org/drawingml/2006/main">
               <a:ext uri="{FF2B5EF4-FFF2-40B4-BE49-F238E27FC236}">
-                <a16:creationId xmlns:a16="http://schemas.microsoft.com/office/drawing/2014/main" id="{43C5CC73-B1A9-4BA5-961A-84E778E4A961}"/>
+                <a16:creationId xmlns:a16="http://schemas.microsoft.com/office/drawing/2014/main" id="{1D56D29D-0EEA-4C52-8312-90F4E0E23C48}"/>
               </a:ext>
             </a:extLst>
           </p:cNvPr>
@@ -2341,7 +2341,7 @@
           <p:cNvPr id="11" name="">
             <a:extLst xmlns:a="http://schemas.openxmlformats.org/drawingml/2006/main">
               <a:ext uri="{FF2B5EF4-FFF2-40B4-BE49-F238E27FC236}">
-                <a16:creationId xmlns:a16="http://schemas.microsoft.com/office/drawing/2014/main" id="{777A5C0C-AB51-4DCB-9C07-D38256C8622E}"/>
+                <a16:creationId xmlns:a16="http://schemas.microsoft.com/office/drawing/2014/main" id="{148C70D9-CEA1-4695-B887-9508B8A43A46}"/>
               </a:ext>
             </a:extLst>
           </p:cNvPr>
@@ -2396,7 +2396,7 @@
     </p:spTree>
     <p:extLst>
       <p:ext uri="{BB962C8B-B14F-4D97-AF65-F5344CB8AC3E}">
-        <p14:creationId xmlns:p14="http://schemas.microsoft.com/office/powerpoint/2010/main" val="514365513"/>
+        <p14:creationId xmlns:p14="http://schemas.microsoft.com/office/powerpoint/2010/main" val="2064529089"/>
       </p:ext>
     </p:extLst>
   </p:cSld>
@@ -2427,7 +2427,7 @@
           <p:cNvPr id="14" name="">
             <a:extLst xmlns:a="http://schemas.openxmlformats.org/drawingml/2006/main">
               <a:ext uri="{FF2B5EF4-FFF2-40B4-BE49-F238E27FC236}">
-                <a16:creationId xmlns:a16="http://schemas.microsoft.com/office/drawing/2014/main" id="{A246869F-C18E-4269-8A63-16C35EB1C3AC}"/>
+                <a16:creationId xmlns:a16="http://schemas.microsoft.com/office/drawing/2014/main" id="{EF8FE43A-1AAE-4679-865A-0A9C05D53224}"/>
               </a:ext>
             </a:extLst>
           </p:cNvPr>
@@ -2459,7 +2459,7 @@
           <p:cNvPr id="2" name="">
             <a:extLst xmlns:a="http://schemas.openxmlformats.org/drawingml/2006/main">
               <a:ext uri="{FF2B5EF4-FFF2-40B4-BE49-F238E27FC236}">
-                <a16:creationId xmlns:a16="http://schemas.microsoft.com/office/drawing/2014/main" id="{1EE7FC80-BCF8-4507-8945-8CFB245EE3F4}"/>
+                <a16:creationId xmlns:a16="http://schemas.microsoft.com/office/drawing/2014/main" id="{8426D58F-727D-476D-B7B4-3CB653F270F9}"/>
               </a:ext>
             </a:extLst>
           </p:cNvPr>
@@ -2516,7 +2516,7 @@
           <p:cNvPr id="3" name="">
             <a:extLst xmlns:a="http://schemas.openxmlformats.org/drawingml/2006/main">
               <a:ext uri="{FF2B5EF4-FFF2-40B4-BE49-F238E27FC236}">
-                <a16:creationId xmlns:a16="http://schemas.microsoft.com/office/drawing/2014/main" id="{E25304B8-D77F-4176-9D67-EB305A24EF4E}"/>
+                <a16:creationId xmlns:a16="http://schemas.microsoft.com/office/drawing/2014/main" id="{1AD3C36B-D947-41F3-8220-D6AD99BE93CC}"/>
               </a:ext>
             </a:extLst>
           </p:cNvPr>
@@ -2548,7 +2548,7 @@
           <p:cNvPr id="4" name="">
             <a:extLst xmlns:a="http://schemas.openxmlformats.org/drawingml/2006/main">
               <a:ext uri="{FF2B5EF4-FFF2-40B4-BE49-F238E27FC236}">
-                <a16:creationId xmlns:a16="http://schemas.microsoft.com/office/drawing/2014/main" id="{33B8F511-7759-408A-B6E5-B6845596631B}"/>
+                <a16:creationId xmlns:a16="http://schemas.microsoft.com/office/drawing/2014/main" id="{EE1101F0-479B-4CEA-B8CB-BD4AF502FC4A}"/>
               </a:ext>
             </a:extLst>
           </p:cNvPr>
@@ -2605,7 +2605,7 @@
           <p:cNvPr id="5" name="">
             <a:extLst xmlns:a="http://schemas.openxmlformats.org/drawingml/2006/main">
               <a:ext uri="{FF2B5EF4-FFF2-40B4-BE49-F238E27FC236}">
-                <a16:creationId xmlns:a16="http://schemas.microsoft.com/office/drawing/2014/main" id="{7895F8FA-9582-4AA0-B43E-3D440D2F78C1}"/>
+                <a16:creationId xmlns:a16="http://schemas.microsoft.com/office/drawing/2014/main" id="{8C130DFF-81C0-476B-8625-C54C961082A9}"/>
               </a:ext>
             </a:extLst>
           </p:cNvPr>
@@ -2662,7 +2662,7 @@
           <p:cNvPr id="6" name="">
             <a:extLst xmlns:a="http://schemas.openxmlformats.org/drawingml/2006/main">
               <a:ext uri="{FF2B5EF4-FFF2-40B4-BE49-F238E27FC236}">
-                <a16:creationId xmlns:a16="http://schemas.microsoft.com/office/drawing/2014/main" id="{DB101429-0509-4E45-BFB1-EEE5FF16CAE4}"/>
+                <a16:creationId xmlns:a16="http://schemas.microsoft.com/office/drawing/2014/main" id="{311D55BE-FEE2-4859-910C-B11F2D6D2960}"/>
               </a:ext>
             </a:extLst>
           </p:cNvPr>
@@ -2719,7 +2719,7 @@
           <p:cNvPr id="7" name="">
             <a:extLst xmlns:a="http://schemas.openxmlformats.org/drawingml/2006/main">
               <a:ext uri="{FF2B5EF4-FFF2-40B4-BE49-F238E27FC236}">
-                <a16:creationId xmlns:a16="http://schemas.microsoft.com/office/drawing/2014/main" id="{8F5F9D9C-3080-4228-A322-C996E278F32B}"/>
+                <a16:creationId xmlns:a16="http://schemas.microsoft.com/office/drawing/2014/main" id="{BB230DB0-C75A-4E0D-8E57-9B14327E650E}"/>
               </a:ext>
             </a:extLst>
           </p:cNvPr>
@@ -2751,7 +2751,7 @@
           <p:cNvPr id="8" name="">
             <a:extLst xmlns:a="http://schemas.openxmlformats.org/drawingml/2006/main">
               <a:ext uri="{FF2B5EF4-FFF2-40B4-BE49-F238E27FC236}">
-                <a16:creationId xmlns:a16="http://schemas.microsoft.com/office/drawing/2014/main" id="{64962B88-E040-44FE-A4EC-13ACFB16D488}"/>
+                <a16:creationId xmlns:a16="http://schemas.microsoft.com/office/drawing/2014/main" id="{F8F86A30-A812-43AE-8E59-74AD67D48A8D}"/>
               </a:ext>
             </a:extLst>
           </p:cNvPr>
@@ -2808,7 +2808,7 @@
           <p:cNvPr id="9" name="">
             <a:extLst xmlns:a="http://schemas.openxmlformats.org/drawingml/2006/main">
               <a:ext uri="{FF2B5EF4-FFF2-40B4-BE49-F238E27FC236}">
-                <a16:creationId xmlns:a16="http://schemas.microsoft.com/office/drawing/2014/main" id="{84C79CEE-CCB2-4630-8EDC-57CEA49C22E3}"/>
+                <a16:creationId xmlns:a16="http://schemas.microsoft.com/office/drawing/2014/main" id="{7C0B0077-4E0F-4E0B-9236-25C51CB437A0}"/>
               </a:ext>
             </a:extLst>
           </p:cNvPr>
@@ -2865,7 +2865,7 @@
           <p:cNvPr id="10" name="">
             <a:extLst xmlns:a="http://schemas.openxmlformats.org/drawingml/2006/main">
               <a:ext uri="{FF2B5EF4-FFF2-40B4-BE49-F238E27FC236}">
-                <a16:creationId xmlns:a16="http://schemas.microsoft.com/office/drawing/2014/main" id="{476AA692-BB2A-4712-9319-853F0C49FFB7}"/>
+                <a16:creationId xmlns:a16="http://schemas.microsoft.com/office/drawing/2014/main" id="{05E48DE2-8565-41A2-B4E2-DA771C4F5670}"/>
               </a:ext>
             </a:extLst>
           </p:cNvPr>
@@ -2922,7 +2922,7 @@
           <p:cNvPr id="11" name="">
             <a:extLst xmlns:a="http://schemas.openxmlformats.org/drawingml/2006/main">
               <a:ext uri="{FF2B5EF4-FFF2-40B4-BE49-F238E27FC236}">
-                <a16:creationId xmlns:a16="http://schemas.microsoft.com/office/drawing/2014/main" id="{C4E278EA-ADD9-49C8-924F-D094B1EDDDE1}"/>
+                <a16:creationId xmlns:a16="http://schemas.microsoft.com/office/drawing/2014/main" id="{AF9079EE-CEE3-4BF8-919F-F48B8955907D}"/>
               </a:ext>
             </a:extLst>
           </p:cNvPr>
@@ -2979,7 +2979,7 @@
           <p:cNvPr id="12" name="">
             <a:extLst xmlns:a="http://schemas.openxmlformats.org/drawingml/2006/main">
               <a:ext uri="{FF2B5EF4-FFF2-40B4-BE49-F238E27FC236}">
-                <a16:creationId xmlns:a16="http://schemas.microsoft.com/office/drawing/2014/main" id="{C6BA8A43-E54A-49DF-92CF-69D72AF15718}"/>
+                <a16:creationId xmlns:a16="http://schemas.microsoft.com/office/drawing/2014/main" id="{67F04C5F-D5D2-4315-A07C-047271917DDD}"/>
               </a:ext>
             </a:extLst>
           </p:cNvPr>
@@ -3036,7 +3036,7 @@
           <p:cNvPr id="13" name="">
             <a:extLst xmlns:a="http://schemas.openxmlformats.org/drawingml/2006/main">
               <a:ext uri="{FF2B5EF4-FFF2-40B4-BE49-F238E27FC236}">
-                <a16:creationId xmlns:a16="http://schemas.microsoft.com/office/drawing/2014/main" id="{CF3C74EE-0E9E-4306-BF56-EC9A18DFD942}"/>
+                <a16:creationId xmlns:a16="http://schemas.microsoft.com/office/drawing/2014/main" id="{11749679-793B-4350-855A-E4A74231D19E}"/>
               </a:ext>
             </a:extLst>
           </p:cNvPr>
@@ -3091,7 +3091,7 @@
     </p:spTree>
     <p:extLst>
       <p:ext uri="{BB962C8B-B14F-4D97-AF65-F5344CB8AC3E}">
-        <p14:creationId xmlns:p14="http://schemas.microsoft.com/office/powerpoint/2010/main" val="1215526604"/>
+        <p14:creationId xmlns:p14="http://schemas.microsoft.com/office/powerpoint/2010/main" val="1615882251"/>
       </p:ext>
     </p:extLst>
   </p:cSld>
@@ -3292,7 +3292,7 @@
           <p:cNvPr id="19" name="">
             <a:extLst xmlns:a="http://schemas.openxmlformats.org/drawingml/2006/main">
               <a:ext uri="{FF2B5EF4-FFF2-40B4-BE49-F238E27FC236}">
-                <a16:creationId xmlns:a16="http://schemas.microsoft.com/office/drawing/2014/main" id="{41029EB4-B2BC-470A-A12D-2C5B91A69B2B}"/>
+                <a16:creationId xmlns:a16="http://schemas.microsoft.com/office/drawing/2014/main" id="{8CBAB7A7-194A-44F2-9C10-0F28A64A4239}"/>
               </a:ext>
             </a:extLst>
           </p:cNvPr>
@@ -3324,7 +3324,7 @@
           <p:cNvPr id="2" name="">
             <a:extLst xmlns:a="http://schemas.openxmlformats.org/drawingml/2006/main">
               <a:ext uri="{FF2B5EF4-FFF2-40B4-BE49-F238E27FC236}">
-                <a16:creationId xmlns:a16="http://schemas.microsoft.com/office/drawing/2014/main" id="{10EC4ECE-B535-42A2-AA26-03004BE72A61}"/>
+                <a16:creationId xmlns:a16="http://schemas.microsoft.com/office/drawing/2014/main" id="{345C0BD9-B628-419D-944F-E4CBFB1A61CA}"/>
               </a:ext>
             </a:extLst>
           </p:cNvPr>
@@ -3381,7 +3381,7 @@
           <p:cNvPr id="3" name="">
             <a:extLst xmlns:a="http://schemas.openxmlformats.org/drawingml/2006/main">
               <a:ext uri="{FF2B5EF4-FFF2-40B4-BE49-F238E27FC236}">
-                <a16:creationId xmlns:a16="http://schemas.microsoft.com/office/drawing/2014/main" id="{A833A797-0C1F-4F4F-AC2E-39D3D7A2FC9A}"/>
+                <a16:creationId xmlns:a16="http://schemas.microsoft.com/office/drawing/2014/main" id="{7A67C1E9-045A-46CF-85B8-E1A3CFE5306B}"/>
               </a:ext>
             </a:extLst>
           </p:cNvPr>
@@ -3413,7 +3413,7 @@
           <p:cNvPr id="4" name="">
             <a:extLst xmlns:a="http://schemas.openxmlformats.org/drawingml/2006/main">
               <a:ext uri="{FF2B5EF4-FFF2-40B4-BE49-F238E27FC236}">
-                <a16:creationId xmlns:a16="http://schemas.microsoft.com/office/drawing/2014/main" id="{432066C2-5441-4697-997B-1C92F37B38C8}"/>
+                <a16:creationId xmlns:a16="http://schemas.microsoft.com/office/drawing/2014/main" id="{F587FECE-B6F7-464A-86AB-914B9A9787E6}"/>
               </a:ext>
             </a:extLst>
           </p:cNvPr>
@@ -3470,7 +3470,7 @@
           <p:cNvPr id="5" name="">
             <a:extLst xmlns:a="http://schemas.openxmlformats.org/drawingml/2006/main">
               <a:ext uri="{FF2B5EF4-FFF2-40B4-BE49-F238E27FC236}">
-                <a16:creationId xmlns:a16="http://schemas.microsoft.com/office/drawing/2014/main" id="{9F36429A-2B72-4CCC-90F8-A717920455B1}"/>
+                <a16:creationId xmlns:a16="http://schemas.microsoft.com/office/drawing/2014/main" id="{C00BD5AC-BAF9-41CF-BEAE-8B1FBBBD23A2}"/>
               </a:ext>
             </a:extLst>
           </p:cNvPr>
@@ -3527,7 +3527,7 @@
           <p:cNvPr id="6" name="">
             <a:extLst xmlns:a="http://schemas.openxmlformats.org/drawingml/2006/main">
               <a:ext uri="{FF2B5EF4-FFF2-40B4-BE49-F238E27FC236}">
-                <a16:creationId xmlns:a16="http://schemas.microsoft.com/office/drawing/2014/main" id="{6D49282E-890A-49E6-BCD7-185E13CB9677}"/>
+                <a16:creationId xmlns:a16="http://schemas.microsoft.com/office/drawing/2014/main" id="{CCA7FAB3-DEC7-4E51-A466-8EF43E882539}"/>
               </a:ext>
             </a:extLst>
           </p:cNvPr>
@@ -3584,7 +3584,7 @@
           <p:cNvPr id="7" name="">
             <a:extLst xmlns:a="http://schemas.openxmlformats.org/drawingml/2006/main">
               <a:ext uri="{FF2B5EF4-FFF2-40B4-BE49-F238E27FC236}">
-                <a16:creationId xmlns:a16="http://schemas.microsoft.com/office/drawing/2014/main" id="{300E3DDB-1A9D-4085-A58F-866BB8426C31}"/>
+                <a16:creationId xmlns:a16="http://schemas.microsoft.com/office/drawing/2014/main" id="{91429F13-4D76-473F-AF59-54CC823F5A2E}"/>
               </a:ext>
             </a:extLst>
           </p:cNvPr>
@@ -3616,7 +3616,7 @@
           <p:cNvPr id="8" name="">
             <a:extLst xmlns:a="http://schemas.openxmlformats.org/drawingml/2006/main">
               <a:ext uri="{FF2B5EF4-FFF2-40B4-BE49-F238E27FC236}">
-                <a16:creationId xmlns:a16="http://schemas.microsoft.com/office/drawing/2014/main" id="{E1D71FCC-8801-4814-A2B2-8B6DBDE4393F}"/>
+                <a16:creationId xmlns:a16="http://schemas.microsoft.com/office/drawing/2014/main" id="{A6F6B95D-B26D-4CD3-BD3F-C8B9C43CC4D6}"/>
               </a:ext>
             </a:extLst>
           </p:cNvPr>
@@ -3673,7 +3673,7 @@
           <p:cNvPr id="9" name="">
             <a:extLst xmlns:a="http://schemas.openxmlformats.org/drawingml/2006/main">
               <a:ext uri="{FF2B5EF4-FFF2-40B4-BE49-F238E27FC236}">
-                <a16:creationId xmlns:a16="http://schemas.microsoft.com/office/drawing/2014/main" id="{7B6EF772-4D50-4A45-AB87-9A687FA30629}"/>
+                <a16:creationId xmlns:a16="http://schemas.microsoft.com/office/drawing/2014/main" id="{1A6712AA-BB24-4512-8501-4FBCDE0F59B7}"/>
               </a:ext>
             </a:extLst>
           </p:cNvPr>
@@ -3730,7 +3730,7 @@
           <p:cNvPr id="10" name="">
             <a:extLst xmlns:a="http://schemas.openxmlformats.org/drawingml/2006/main">
               <a:ext uri="{FF2B5EF4-FFF2-40B4-BE49-F238E27FC236}">
-                <a16:creationId xmlns:a16="http://schemas.microsoft.com/office/drawing/2014/main" id="{FC365161-6CDE-44AD-8158-177443C60F73}"/>
+                <a16:creationId xmlns:a16="http://schemas.microsoft.com/office/drawing/2014/main" id="{3F70F8D7-1D55-48AA-B631-9B8D3F17FFC6}"/>
               </a:ext>
             </a:extLst>
           </p:cNvPr>
@@ -3787,7 +3787,7 @@
           <p:cNvPr id="11" name="">
             <a:extLst xmlns:a="http://schemas.openxmlformats.org/drawingml/2006/main">
               <a:ext uri="{FF2B5EF4-FFF2-40B4-BE49-F238E27FC236}">
-                <a16:creationId xmlns:a16="http://schemas.microsoft.com/office/drawing/2014/main" id="{BDB33DB4-2658-4BA0-A16E-B345D8E09E80}"/>
+                <a16:creationId xmlns:a16="http://schemas.microsoft.com/office/drawing/2014/main" id="{F4D4FC5B-04E5-4421-877E-5CB40F730CF9}"/>
               </a:ext>
             </a:extLst>
           </p:cNvPr>
@@ -3821,7 +3821,7 @@
           <p:cNvPr id="12" name="">
             <a:extLst xmlns:a="http://schemas.openxmlformats.org/drawingml/2006/main">
               <a:ext uri="{FF2B5EF4-FFF2-40B4-BE49-F238E27FC236}">
-                <a16:creationId xmlns:a16="http://schemas.microsoft.com/office/drawing/2014/main" id="{63697F49-61B0-4482-A9DD-C57381C6310A}"/>
+                <a16:creationId xmlns:a16="http://schemas.microsoft.com/office/drawing/2014/main" id="{FC48F529-5197-4934-972C-13F3C4918572}"/>
               </a:ext>
             </a:extLst>
           </p:cNvPr>
@@ -3878,7 +3878,7 @@
           <p:cNvPr id="13" name="">
             <a:extLst xmlns:a="http://schemas.openxmlformats.org/drawingml/2006/main">
               <a:ext uri="{FF2B5EF4-FFF2-40B4-BE49-F238E27FC236}">
-                <a16:creationId xmlns:a16="http://schemas.microsoft.com/office/drawing/2014/main" id="{33280B12-5671-4BEA-87D4-63F3752C04AE}"/>
+                <a16:creationId xmlns:a16="http://schemas.microsoft.com/office/drawing/2014/main" id="{40640513-8E2B-49BA-A002-824D032E73CE}"/>
               </a:ext>
             </a:extLst>
           </p:cNvPr>
@@ -3935,7 +3935,7 @@
           <p:cNvPr id="14" name="">
             <a:extLst xmlns:a="http://schemas.openxmlformats.org/drawingml/2006/main">
               <a:ext uri="{FF2B5EF4-FFF2-40B4-BE49-F238E27FC236}">
-                <a16:creationId xmlns:a16="http://schemas.microsoft.com/office/drawing/2014/main" id="{E7CDBC12-787B-4E08-9B62-9C9AFE08D4E7}"/>
+                <a16:creationId xmlns:a16="http://schemas.microsoft.com/office/drawing/2014/main" id="{B3350A1B-26F8-445B-8621-0505A163D2CA}"/>
               </a:ext>
             </a:extLst>
           </p:cNvPr>
@@ -3992,7 +3992,7 @@
           <p:cNvPr id="15" name="">
             <a:extLst xmlns:a="http://schemas.openxmlformats.org/drawingml/2006/main">
               <a:ext uri="{FF2B5EF4-FFF2-40B4-BE49-F238E27FC236}">
-                <a16:creationId xmlns:a16="http://schemas.microsoft.com/office/drawing/2014/main" id="{0BB50776-1BFB-46AF-BB43-0AE65F4D9B64}"/>
+                <a16:creationId xmlns:a16="http://schemas.microsoft.com/office/drawing/2014/main" id="{F97CAFBB-6445-4F1D-AA41-7DC196210109}"/>
               </a:ext>
             </a:extLst>
           </p:cNvPr>
@@ -4026,7 +4026,7 @@
           <p:cNvPr id="16" name="">
             <a:extLst xmlns:a="http://schemas.openxmlformats.org/drawingml/2006/main">
               <a:ext uri="{FF2B5EF4-FFF2-40B4-BE49-F238E27FC236}">
-                <a16:creationId xmlns:a16="http://schemas.microsoft.com/office/drawing/2014/main" id="{ACE28174-DF30-469E-A552-47016D646235}"/>
+                <a16:creationId xmlns:a16="http://schemas.microsoft.com/office/drawing/2014/main" id="{9E4557F5-B3D8-45D9-A9A1-976D37E28560}"/>
               </a:ext>
             </a:extLst>
           </p:cNvPr>
@@ -4083,7 +4083,7 @@
           <p:cNvPr id="17" name="">
             <a:extLst xmlns:a="http://schemas.openxmlformats.org/drawingml/2006/main">
               <a:ext uri="{FF2B5EF4-FFF2-40B4-BE49-F238E27FC236}">
-                <a16:creationId xmlns:a16="http://schemas.microsoft.com/office/drawing/2014/main" id="{F045E149-C7AA-4D2E-A3B4-BB040F6B2C39}"/>
+                <a16:creationId xmlns:a16="http://schemas.microsoft.com/office/drawing/2014/main" id="{C9F73EBD-F2FD-4E56-9BD1-3E19612C651D}"/>
               </a:ext>
             </a:extLst>
           </p:cNvPr>
@@ -4140,7 +4140,7 @@
           <p:cNvPr id="18" name="">
             <a:extLst xmlns:a="http://schemas.openxmlformats.org/drawingml/2006/main">
               <a:ext uri="{FF2B5EF4-FFF2-40B4-BE49-F238E27FC236}">
-                <a16:creationId xmlns:a16="http://schemas.microsoft.com/office/drawing/2014/main" id="{080B586D-A645-43EA-BB54-05535E979CC1}"/>
+                <a16:creationId xmlns:a16="http://schemas.microsoft.com/office/drawing/2014/main" id="{A6FDC5CC-5658-415C-87D2-28253BAA2DE3}"/>
               </a:ext>
             </a:extLst>
           </p:cNvPr>
@@ -4195,7 +4195,7 @@
     </p:spTree>
     <p:extLst>
       <p:ext uri="{BB962C8B-B14F-4D97-AF65-F5344CB8AC3E}">
-        <p14:creationId xmlns:p14="http://schemas.microsoft.com/office/powerpoint/2010/main" val="32100094"/>
+        <p14:creationId xmlns:p14="http://schemas.microsoft.com/office/powerpoint/2010/main" val="1086187812"/>
       </p:ext>
     </p:extLst>
   </p:cSld>
@@ -4350,7 +4350,7 @@
           <p:cNvPr id="23" name="">
             <a:extLst xmlns:a="http://schemas.openxmlformats.org/drawingml/2006/main">
               <a:ext uri="{FF2B5EF4-FFF2-40B4-BE49-F238E27FC236}">
-                <a16:creationId xmlns:a16="http://schemas.microsoft.com/office/drawing/2014/main" id="{5C6FB7A0-0EED-4871-92B8-35AB820862B2}"/>
+                <a16:creationId xmlns:a16="http://schemas.microsoft.com/office/drawing/2014/main" id="{88C6B5CF-1E38-491C-96C2-3D245A7E28C3}"/>
               </a:ext>
             </a:extLst>
           </p:cNvPr>
@@ -4382,7 +4382,7 @@
           <p:cNvPr id="2" name="">
             <a:extLst xmlns:a="http://schemas.openxmlformats.org/drawingml/2006/main">
               <a:ext uri="{FF2B5EF4-FFF2-40B4-BE49-F238E27FC236}">
-                <a16:creationId xmlns:a16="http://schemas.microsoft.com/office/drawing/2014/main" id="{B10B43BA-4C58-4CF3-95C7-DAA75670939D}"/>
+                <a16:creationId xmlns:a16="http://schemas.microsoft.com/office/drawing/2014/main" id="{B88EBEEB-3E0B-4BC4-ADF6-4A9D80AA6E05}"/>
               </a:ext>
             </a:extLst>
           </p:cNvPr>
@@ -4439,7 +4439,7 @@
           <p:cNvPr id="3" name="">
             <a:extLst xmlns:a="http://schemas.openxmlformats.org/drawingml/2006/main">
               <a:ext uri="{FF2B5EF4-FFF2-40B4-BE49-F238E27FC236}">
-                <a16:creationId xmlns:a16="http://schemas.microsoft.com/office/drawing/2014/main" id="{EBDCCFFB-9FAB-47E2-8423-1B3B93BC6C9D}"/>
+                <a16:creationId xmlns:a16="http://schemas.microsoft.com/office/drawing/2014/main" id="{9710668E-9BE1-48B1-946F-9A455BD24BDE}"/>
               </a:ext>
             </a:extLst>
           </p:cNvPr>
@@ -4471,7 +4471,7 @@
           <p:cNvPr id="4" name="">
             <a:extLst xmlns:a="http://schemas.openxmlformats.org/drawingml/2006/main">
               <a:ext uri="{FF2B5EF4-FFF2-40B4-BE49-F238E27FC236}">
-                <a16:creationId xmlns:a16="http://schemas.microsoft.com/office/drawing/2014/main" id="{998D1D49-6169-4FCA-9824-327FAF6F3DAE}"/>
+                <a16:creationId xmlns:a16="http://schemas.microsoft.com/office/drawing/2014/main" id="{AE92D0F2-05B0-4DBD-90F1-01D6F2008E92}"/>
               </a:ext>
             </a:extLst>
           </p:cNvPr>
@@ -4528,7 +4528,7 @@
           <p:cNvPr id="5" name="">
             <a:extLst xmlns:a="http://schemas.openxmlformats.org/drawingml/2006/main">
               <a:ext uri="{FF2B5EF4-FFF2-40B4-BE49-F238E27FC236}">
-                <a16:creationId xmlns:a16="http://schemas.microsoft.com/office/drawing/2014/main" id="{5DFF218A-62BA-4946-9D79-6A266841BA7D}"/>
+                <a16:creationId xmlns:a16="http://schemas.microsoft.com/office/drawing/2014/main" id="{F2B25622-AFD1-4DEC-8344-11E315E0E596}"/>
               </a:ext>
             </a:extLst>
           </p:cNvPr>
@@ -4585,7 +4585,7 @@
           <p:cNvPr id="6" name="">
             <a:extLst xmlns:a="http://schemas.openxmlformats.org/drawingml/2006/main">
               <a:ext uri="{FF2B5EF4-FFF2-40B4-BE49-F238E27FC236}">
-                <a16:creationId xmlns:a16="http://schemas.microsoft.com/office/drawing/2014/main" id="{F63C1B45-FDC9-4EB2-9A13-824A4E1E227A}"/>
+                <a16:creationId xmlns:a16="http://schemas.microsoft.com/office/drawing/2014/main" id="{041BBC55-8DF0-4A5D-8AF9-BBEF8AD7AE3C}"/>
               </a:ext>
             </a:extLst>
           </p:cNvPr>
@@ -4642,7 +4642,7 @@
           <p:cNvPr id="7" name="">
             <a:extLst xmlns:a="http://schemas.openxmlformats.org/drawingml/2006/main">
               <a:ext uri="{FF2B5EF4-FFF2-40B4-BE49-F238E27FC236}">
-                <a16:creationId xmlns:a16="http://schemas.microsoft.com/office/drawing/2014/main" id="{5CB4F722-E573-4B51-AD64-39C27BB4ACCF}"/>
+                <a16:creationId xmlns:a16="http://schemas.microsoft.com/office/drawing/2014/main" id="{58642303-D2B5-4998-B684-C648783629A0}"/>
               </a:ext>
             </a:extLst>
           </p:cNvPr>
@@ -4674,7 +4674,7 @@
           <p:cNvPr id="8" name="">
             <a:extLst xmlns:a="http://schemas.openxmlformats.org/drawingml/2006/main">
               <a:ext uri="{FF2B5EF4-FFF2-40B4-BE49-F238E27FC236}">
-                <a16:creationId xmlns:a16="http://schemas.microsoft.com/office/drawing/2014/main" id="{C9144373-39CE-4598-93FE-3F07C58D63F2}"/>
+                <a16:creationId xmlns:a16="http://schemas.microsoft.com/office/drawing/2014/main" id="{A8619302-0DEC-4765-B942-7A59FDA6B79E}"/>
               </a:ext>
             </a:extLst>
           </p:cNvPr>
@@ -4731,7 +4731,7 @@
           <p:cNvPr id="9" name="">
             <a:extLst xmlns:a="http://schemas.openxmlformats.org/drawingml/2006/main">
               <a:ext uri="{FF2B5EF4-FFF2-40B4-BE49-F238E27FC236}">
-                <a16:creationId xmlns:a16="http://schemas.microsoft.com/office/drawing/2014/main" id="{ED329786-069D-492E-A29D-02B50FC9376F}"/>
+                <a16:creationId xmlns:a16="http://schemas.microsoft.com/office/drawing/2014/main" id="{0D11E7FF-9789-4B72-BB26-C637E42915B4}"/>
               </a:ext>
             </a:extLst>
           </p:cNvPr>
@@ -4788,7 +4788,7 @@
           <p:cNvPr id="10" name="">
             <a:extLst xmlns:a="http://schemas.openxmlformats.org/drawingml/2006/main">
               <a:ext uri="{FF2B5EF4-FFF2-40B4-BE49-F238E27FC236}">
-                <a16:creationId xmlns:a16="http://schemas.microsoft.com/office/drawing/2014/main" id="{86EA907C-B04D-4C45-ACF8-AFEDBC1C06DE}"/>
+                <a16:creationId xmlns:a16="http://schemas.microsoft.com/office/drawing/2014/main" id="{C729488F-8A31-4CE1-BF8E-5592935664B0}"/>
               </a:ext>
             </a:extLst>
           </p:cNvPr>
@@ -4822,7 +4822,7 @@
           <p:cNvPr id="11" name="">
             <a:extLst xmlns:a="http://schemas.openxmlformats.org/drawingml/2006/main">
               <a:ext uri="{FF2B5EF4-FFF2-40B4-BE49-F238E27FC236}">
-                <a16:creationId xmlns:a16="http://schemas.microsoft.com/office/drawing/2014/main" id="{4878EA49-86F6-4E54-8E7A-C17518FAA8FF}"/>
+                <a16:creationId xmlns:a16="http://schemas.microsoft.com/office/drawing/2014/main" id="{DFB84B82-13F1-4B49-8F92-4690A3A9D3C4}"/>
               </a:ext>
             </a:extLst>
           </p:cNvPr>
@@ -4854,7 +4854,7 @@
           <p:cNvPr id="12" name="">
             <a:extLst xmlns:a="http://schemas.openxmlformats.org/drawingml/2006/main">
               <a:ext uri="{FF2B5EF4-FFF2-40B4-BE49-F238E27FC236}">
-                <a16:creationId xmlns:a16="http://schemas.microsoft.com/office/drawing/2014/main" id="{9AE711A0-8358-434E-8CEE-08739FF107BB}"/>
+                <a16:creationId xmlns:a16="http://schemas.microsoft.com/office/drawing/2014/main" id="{A953751D-2916-498F-B8DE-97321DD72EB2}"/>
               </a:ext>
             </a:extLst>
           </p:cNvPr>
@@ -4911,7 +4911,7 @@
           <p:cNvPr id="13" name="">
             <a:extLst xmlns:a="http://schemas.openxmlformats.org/drawingml/2006/main">
               <a:ext uri="{FF2B5EF4-FFF2-40B4-BE49-F238E27FC236}">
-                <a16:creationId xmlns:a16="http://schemas.microsoft.com/office/drawing/2014/main" id="{B0146D13-6C84-4528-8A40-31389AA0B55A}"/>
+                <a16:creationId xmlns:a16="http://schemas.microsoft.com/office/drawing/2014/main" id="{4DE48505-1814-48E7-AA37-6723FD6E5181}"/>
               </a:ext>
             </a:extLst>
           </p:cNvPr>
@@ -4968,7 +4968,7 @@
           <p:cNvPr id="14" name="">
             <a:extLst xmlns:a="http://schemas.openxmlformats.org/drawingml/2006/main">
               <a:ext uri="{FF2B5EF4-FFF2-40B4-BE49-F238E27FC236}">
-                <a16:creationId xmlns:a16="http://schemas.microsoft.com/office/drawing/2014/main" id="{D24E3ADC-8CF1-4ACA-A886-18C0691A38EC}"/>
+                <a16:creationId xmlns:a16="http://schemas.microsoft.com/office/drawing/2014/main" id="{35FBAF1F-A61F-432C-84EE-C17DC1F41376}"/>
               </a:ext>
             </a:extLst>
           </p:cNvPr>
@@ -5002,7 +5002,7 @@
           <p:cNvPr id="15" name="">
             <a:extLst xmlns:a="http://schemas.openxmlformats.org/drawingml/2006/main">
               <a:ext uri="{FF2B5EF4-FFF2-40B4-BE49-F238E27FC236}">
-                <a16:creationId xmlns:a16="http://schemas.microsoft.com/office/drawing/2014/main" id="{6A2E4D06-1630-46D9-BF72-B34B38FB369C}"/>
+                <a16:creationId xmlns:a16="http://schemas.microsoft.com/office/drawing/2014/main" id="{2E96F2BE-2077-4139-A57D-D31FF126C0A1}"/>
               </a:ext>
             </a:extLst>
           </p:cNvPr>
@@ -5034,7 +5034,7 @@
           <p:cNvPr id="16" name="">
             <a:extLst xmlns:a="http://schemas.openxmlformats.org/drawingml/2006/main">
               <a:ext uri="{FF2B5EF4-FFF2-40B4-BE49-F238E27FC236}">
-                <a16:creationId xmlns:a16="http://schemas.microsoft.com/office/drawing/2014/main" id="{618133A2-75AC-4324-8DFB-DFAADD09F9D9}"/>
+                <a16:creationId xmlns:a16="http://schemas.microsoft.com/office/drawing/2014/main" id="{C32C67FA-8E04-4D50-AEB6-3330B5BC4B69}"/>
               </a:ext>
             </a:extLst>
           </p:cNvPr>
@@ -5091,7 +5091,7 @@
           <p:cNvPr id="17" name="">
             <a:extLst xmlns:a="http://schemas.openxmlformats.org/drawingml/2006/main">
               <a:ext uri="{FF2B5EF4-FFF2-40B4-BE49-F238E27FC236}">
-                <a16:creationId xmlns:a16="http://schemas.microsoft.com/office/drawing/2014/main" id="{0CDAA496-E400-47DC-B99F-A18724CB7238}"/>
+                <a16:creationId xmlns:a16="http://schemas.microsoft.com/office/drawing/2014/main" id="{2F2F7D2F-A62B-4233-B558-D97D1E5FDB31}"/>
               </a:ext>
             </a:extLst>
           </p:cNvPr>
@@ -5148,7 +5148,7 @@
           <p:cNvPr id="18" name="">
             <a:extLst xmlns:a="http://schemas.openxmlformats.org/drawingml/2006/main">
               <a:ext uri="{FF2B5EF4-FFF2-40B4-BE49-F238E27FC236}">
-                <a16:creationId xmlns:a16="http://schemas.microsoft.com/office/drawing/2014/main" id="{53C005E3-5AAF-4A52-A2E6-7D0CCDFEA6A4}"/>
+                <a16:creationId xmlns:a16="http://schemas.microsoft.com/office/drawing/2014/main" id="{499D3674-ECA6-42F7-8CF7-4D35003F0A42}"/>
               </a:ext>
             </a:extLst>
           </p:cNvPr>
@@ -5182,7 +5182,7 @@
           <p:cNvPr id="19" name="">
             <a:extLst xmlns:a="http://schemas.openxmlformats.org/drawingml/2006/main">
               <a:ext uri="{FF2B5EF4-FFF2-40B4-BE49-F238E27FC236}">
-                <a16:creationId xmlns:a16="http://schemas.microsoft.com/office/drawing/2014/main" id="{67BFB22F-11E4-4A54-BC24-D8AB3E121B4A}"/>
+                <a16:creationId xmlns:a16="http://schemas.microsoft.com/office/drawing/2014/main" id="{3C7A7A89-D4DE-46C8-8C9F-83B38F5C3B47}"/>
               </a:ext>
             </a:extLst>
           </p:cNvPr>
@@ -5214,7 +5214,7 @@
           <p:cNvPr id="20" name="">
             <a:extLst xmlns:a="http://schemas.openxmlformats.org/drawingml/2006/main">
               <a:ext uri="{FF2B5EF4-FFF2-40B4-BE49-F238E27FC236}">
-                <a16:creationId xmlns:a16="http://schemas.microsoft.com/office/drawing/2014/main" id="{BC7C0A01-E125-405D-9DBB-7B8416031915}"/>
+                <a16:creationId xmlns:a16="http://schemas.microsoft.com/office/drawing/2014/main" id="{8283A265-3903-47B6-AB1E-DF306716FC9F}"/>
               </a:ext>
             </a:extLst>
           </p:cNvPr>
@@ -5271,7 +5271,7 @@
           <p:cNvPr id="21" name="">
             <a:extLst xmlns:a="http://schemas.openxmlformats.org/drawingml/2006/main">
               <a:ext uri="{FF2B5EF4-FFF2-40B4-BE49-F238E27FC236}">
-                <a16:creationId xmlns:a16="http://schemas.microsoft.com/office/drawing/2014/main" id="{C28D98B9-ACE1-4569-A3F9-D5B0D0EB9B1F}"/>
+                <a16:creationId xmlns:a16="http://schemas.microsoft.com/office/drawing/2014/main" id="{A2A7EC8B-3A75-4157-B8B6-48C8546309E5}"/>
               </a:ext>
             </a:extLst>
           </p:cNvPr>
@@ -5328,7 +5328,7 @@
           <p:cNvPr id="22" name="">
             <a:extLst xmlns:a="http://schemas.openxmlformats.org/drawingml/2006/main">
               <a:ext uri="{FF2B5EF4-FFF2-40B4-BE49-F238E27FC236}">
-                <a16:creationId xmlns:a16="http://schemas.microsoft.com/office/drawing/2014/main" id="{B3256CF3-5DE9-4F68-B740-BB4410F57641}"/>
+                <a16:creationId xmlns:a16="http://schemas.microsoft.com/office/drawing/2014/main" id="{9AD0747B-9E97-4918-BD63-A1228D3C3BBA}"/>
               </a:ext>
             </a:extLst>
           </p:cNvPr>
@@ -5383,7 +5383,7 @@
     </p:spTree>
     <p:extLst>
       <p:ext uri="{BB962C8B-B14F-4D97-AF65-F5344CB8AC3E}">
-        <p14:creationId xmlns:p14="http://schemas.microsoft.com/office/powerpoint/2010/main" val="662886107"/>
+        <p14:creationId xmlns:p14="http://schemas.microsoft.com/office/powerpoint/2010/main" val="840351781"/>
       </p:ext>
     </p:extLst>
   </p:cSld>
@@ -5584,7 +5584,7 @@
           <p:cNvPr id="23" name="">
             <a:extLst xmlns:a="http://schemas.openxmlformats.org/drawingml/2006/main">
               <a:ext uri="{FF2B5EF4-FFF2-40B4-BE49-F238E27FC236}">
-                <a16:creationId xmlns:a16="http://schemas.microsoft.com/office/drawing/2014/main" id="{5B08D4DA-7AA7-4FF4-BE68-D96C8FCA5E58}"/>
+                <a16:creationId xmlns:a16="http://schemas.microsoft.com/office/drawing/2014/main" id="{D5486EEC-C2F9-404A-A87B-F47EC178B783}"/>
               </a:ext>
             </a:extLst>
           </p:cNvPr>
@@ -5616,7 +5616,7 @@
           <p:cNvPr id="2" name="">
             <a:extLst xmlns:a="http://schemas.openxmlformats.org/drawingml/2006/main">
               <a:ext uri="{FF2B5EF4-FFF2-40B4-BE49-F238E27FC236}">
-                <a16:creationId xmlns:a16="http://schemas.microsoft.com/office/drawing/2014/main" id="{07ADC1A3-41A9-4E62-BD1C-A413EE49F3F3}"/>
+                <a16:creationId xmlns:a16="http://schemas.microsoft.com/office/drawing/2014/main" id="{DEA55980-7E01-40E9-8FAD-317F24EE4487}"/>
               </a:ext>
             </a:extLst>
           </p:cNvPr>
@@ -5673,7 +5673,7 @@
           <p:cNvPr id="3" name="">
             <a:extLst xmlns:a="http://schemas.openxmlformats.org/drawingml/2006/main">
               <a:ext uri="{FF2B5EF4-FFF2-40B4-BE49-F238E27FC236}">
-                <a16:creationId xmlns:a16="http://schemas.microsoft.com/office/drawing/2014/main" id="{59687848-DF5C-4664-8C51-221C62EFCF1D}"/>
+                <a16:creationId xmlns:a16="http://schemas.microsoft.com/office/drawing/2014/main" id="{7E9FF3ED-024F-46D2-9F52-8AF4697B2B89}"/>
               </a:ext>
             </a:extLst>
           </p:cNvPr>
@@ -5705,7 +5705,7 @@
           <p:cNvPr id="4" name="">
             <a:extLst xmlns:a="http://schemas.openxmlformats.org/drawingml/2006/main">
               <a:ext uri="{FF2B5EF4-FFF2-40B4-BE49-F238E27FC236}">
-                <a16:creationId xmlns:a16="http://schemas.microsoft.com/office/drawing/2014/main" id="{CAA92D0B-71FD-4D97-A5CC-681663353E24}"/>
+                <a16:creationId xmlns:a16="http://schemas.microsoft.com/office/drawing/2014/main" id="{1EC6D36C-9AAA-4260-B659-D6B7F4BC65E4}"/>
               </a:ext>
             </a:extLst>
           </p:cNvPr>
@@ -5762,7 +5762,7 @@
           <p:cNvPr id="5" name="">
             <a:extLst xmlns:a="http://schemas.openxmlformats.org/drawingml/2006/main">
               <a:ext uri="{FF2B5EF4-FFF2-40B4-BE49-F238E27FC236}">
-                <a16:creationId xmlns:a16="http://schemas.microsoft.com/office/drawing/2014/main" id="{1B4F5B88-9804-40A3-A062-1CF8B554E186}"/>
+                <a16:creationId xmlns:a16="http://schemas.microsoft.com/office/drawing/2014/main" id="{7620C1B5-2244-471D-B63F-C9AB8C39EED5}"/>
               </a:ext>
             </a:extLst>
           </p:cNvPr>
@@ -5819,7 +5819,7 @@
           <p:cNvPr id="6" name="">
             <a:extLst xmlns:a="http://schemas.openxmlformats.org/drawingml/2006/main">
               <a:ext uri="{FF2B5EF4-FFF2-40B4-BE49-F238E27FC236}">
-                <a16:creationId xmlns:a16="http://schemas.microsoft.com/office/drawing/2014/main" id="{2B328BBC-1D17-4981-A266-4B37A5AA40C8}"/>
+                <a16:creationId xmlns:a16="http://schemas.microsoft.com/office/drawing/2014/main" id="{BF0622B2-A5B1-4E0B-8F1F-D563427D5159}"/>
               </a:ext>
             </a:extLst>
           </p:cNvPr>
@@ -5876,7 +5876,7 @@
           <p:cNvPr id="7" name="">
             <a:extLst xmlns:a="http://schemas.openxmlformats.org/drawingml/2006/main">
               <a:ext uri="{FF2B5EF4-FFF2-40B4-BE49-F238E27FC236}">
-                <a16:creationId xmlns:a16="http://schemas.microsoft.com/office/drawing/2014/main" id="{189195F3-47BF-4923-AE2B-99212FC85917}"/>
+                <a16:creationId xmlns:a16="http://schemas.microsoft.com/office/drawing/2014/main" id="{352BA35D-3E34-417D-B0E0-8F9336F5AC41}"/>
               </a:ext>
             </a:extLst>
           </p:cNvPr>
@@ -5908,7 +5908,7 @@
           <p:cNvPr id="8" name="">
             <a:extLst xmlns:a="http://schemas.openxmlformats.org/drawingml/2006/main">
               <a:ext uri="{FF2B5EF4-FFF2-40B4-BE49-F238E27FC236}">
-                <a16:creationId xmlns:a16="http://schemas.microsoft.com/office/drawing/2014/main" id="{9C9B77A8-F918-4931-A99D-9527E2DD2A7A}"/>
+                <a16:creationId xmlns:a16="http://schemas.microsoft.com/office/drawing/2014/main" id="{ECA6035A-4E74-44A9-9361-616694D77314}"/>
               </a:ext>
             </a:extLst>
           </p:cNvPr>
@@ -5965,7 +5965,7 @@
           <p:cNvPr id="9" name="">
             <a:extLst xmlns:a="http://schemas.openxmlformats.org/drawingml/2006/main">
               <a:ext uri="{FF2B5EF4-FFF2-40B4-BE49-F238E27FC236}">
-                <a16:creationId xmlns:a16="http://schemas.microsoft.com/office/drawing/2014/main" id="{198AAE10-1253-4171-A19D-E43F5C6C6691}"/>
+                <a16:creationId xmlns:a16="http://schemas.microsoft.com/office/drawing/2014/main" id="{8C0EC189-603E-4763-9480-052919AFA8C6}"/>
               </a:ext>
             </a:extLst>
           </p:cNvPr>
@@ -6022,7 +6022,7 @@
           <p:cNvPr id="10" name="">
             <a:extLst xmlns:a="http://schemas.openxmlformats.org/drawingml/2006/main">
               <a:ext uri="{FF2B5EF4-FFF2-40B4-BE49-F238E27FC236}">
-                <a16:creationId xmlns:a16="http://schemas.microsoft.com/office/drawing/2014/main" id="{6341FD11-AF45-4BCC-A704-0F3BC0B7724B}"/>
+                <a16:creationId xmlns:a16="http://schemas.microsoft.com/office/drawing/2014/main" id="{DC89FEE1-9C22-4D77-8364-B0CD57D41224}"/>
               </a:ext>
             </a:extLst>
           </p:cNvPr>
@@ -6056,7 +6056,7 @@
           <p:cNvPr id="11" name="">
             <a:extLst xmlns:a="http://schemas.openxmlformats.org/drawingml/2006/main">
               <a:ext uri="{FF2B5EF4-FFF2-40B4-BE49-F238E27FC236}">
-                <a16:creationId xmlns:a16="http://schemas.microsoft.com/office/drawing/2014/main" id="{A55C4504-2EB5-4460-9666-85E9B3DA2900}"/>
+                <a16:creationId xmlns:a16="http://schemas.microsoft.com/office/drawing/2014/main" id="{8D22654E-1111-44F7-9C50-0764AD751630}"/>
               </a:ext>
             </a:extLst>
           </p:cNvPr>
@@ -6088,7 +6088,7 @@
           <p:cNvPr id="12" name="">
             <a:extLst xmlns:a="http://schemas.openxmlformats.org/drawingml/2006/main">
               <a:ext uri="{FF2B5EF4-FFF2-40B4-BE49-F238E27FC236}">
-                <a16:creationId xmlns:a16="http://schemas.microsoft.com/office/drawing/2014/main" id="{51FB6535-48C3-4B61-9ED4-477696794415}"/>
+                <a16:creationId xmlns:a16="http://schemas.microsoft.com/office/drawing/2014/main" id="{9B358EA9-A311-4059-9B26-08BFAD80875D}"/>
               </a:ext>
             </a:extLst>
           </p:cNvPr>
@@ -6145,7 +6145,7 @@
           <p:cNvPr id="13" name="">
             <a:extLst xmlns:a="http://schemas.openxmlformats.org/drawingml/2006/main">
               <a:ext uri="{FF2B5EF4-FFF2-40B4-BE49-F238E27FC236}">
-                <a16:creationId xmlns:a16="http://schemas.microsoft.com/office/drawing/2014/main" id="{C2D6DD35-5C28-4C56-B7C0-E2732484C3E9}"/>
+                <a16:creationId xmlns:a16="http://schemas.microsoft.com/office/drawing/2014/main" id="{02091F3B-1E2C-4FD2-97EF-99C65186A326}"/>
               </a:ext>
             </a:extLst>
           </p:cNvPr>
@@ -6202,7 +6202,7 @@
           <p:cNvPr id="14" name="">
             <a:extLst xmlns:a="http://schemas.openxmlformats.org/drawingml/2006/main">
               <a:ext uri="{FF2B5EF4-FFF2-40B4-BE49-F238E27FC236}">
-                <a16:creationId xmlns:a16="http://schemas.microsoft.com/office/drawing/2014/main" id="{F95421F1-74CC-4DE6-B967-3B5CE13CCECA}"/>
+                <a16:creationId xmlns:a16="http://schemas.microsoft.com/office/drawing/2014/main" id="{509189F1-8989-4FEE-B640-B0C3117E2FBE}"/>
               </a:ext>
             </a:extLst>
           </p:cNvPr>
@@ -6236,7 +6236,7 @@
           <p:cNvPr id="15" name="">
             <a:extLst xmlns:a="http://schemas.openxmlformats.org/drawingml/2006/main">
               <a:ext uri="{FF2B5EF4-FFF2-40B4-BE49-F238E27FC236}">
-                <a16:creationId xmlns:a16="http://schemas.microsoft.com/office/drawing/2014/main" id="{75E57ACB-280C-4AA3-BA24-F62DB13B1BAF}"/>
+                <a16:creationId xmlns:a16="http://schemas.microsoft.com/office/drawing/2014/main" id="{D5831570-6AA2-4086-B964-24DD595D68E2}"/>
               </a:ext>
             </a:extLst>
           </p:cNvPr>
@@ -6268,7 +6268,7 @@
           <p:cNvPr id="16" name="">
             <a:extLst xmlns:a="http://schemas.openxmlformats.org/drawingml/2006/main">
               <a:ext uri="{FF2B5EF4-FFF2-40B4-BE49-F238E27FC236}">
-                <a16:creationId xmlns:a16="http://schemas.microsoft.com/office/drawing/2014/main" id="{C0D540D9-2C9A-4029-BF9F-A15C8451FB24}"/>
+                <a16:creationId xmlns:a16="http://schemas.microsoft.com/office/drawing/2014/main" id="{A0B18DCC-30F5-45A4-8339-9BB469E85E04}"/>
               </a:ext>
             </a:extLst>
           </p:cNvPr>
@@ -6325,7 +6325,7 @@
           <p:cNvPr id="17" name="">
             <a:extLst xmlns:a="http://schemas.openxmlformats.org/drawingml/2006/main">
               <a:ext uri="{FF2B5EF4-FFF2-40B4-BE49-F238E27FC236}">
-                <a16:creationId xmlns:a16="http://schemas.microsoft.com/office/drawing/2014/main" id="{E4EB8442-C5BD-40D8-B157-D09211ABAB78}"/>
+                <a16:creationId xmlns:a16="http://schemas.microsoft.com/office/drawing/2014/main" id="{46FC9706-8145-45EC-9A5F-BF20EEA3FEA8}"/>
               </a:ext>
             </a:extLst>
           </p:cNvPr>
@@ -6382,7 +6382,7 @@
           <p:cNvPr id="18" name="">
             <a:extLst xmlns:a="http://schemas.openxmlformats.org/drawingml/2006/main">
               <a:ext uri="{FF2B5EF4-FFF2-40B4-BE49-F238E27FC236}">
-                <a16:creationId xmlns:a16="http://schemas.microsoft.com/office/drawing/2014/main" id="{71D56D97-222D-4996-8B8F-793A1A45E68A}"/>
+                <a16:creationId xmlns:a16="http://schemas.microsoft.com/office/drawing/2014/main" id="{C158E24E-7A32-45FE-B9A4-2481B5F4317D}"/>
               </a:ext>
             </a:extLst>
           </p:cNvPr>
@@ -6416,7 +6416,7 @@
           <p:cNvPr id="19" name="">
             <a:extLst xmlns:a="http://schemas.openxmlformats.org/drawingml/2006/main">
               <a:ext uri="{FF2B5EF4-FFF2-40B4-BE49-F238E27FC236}">
-                <a16:creationId xmlns:a16="http://schemas.microsoft.com/office/drawing/2014/main" id="{73C08601-384E-41C3-B8C0-D54825A1742E}"/>
+                <a16:creationId xmlns:a16="http://schemas.microsoft.com/office/drawing/2014/main" id="{F2B090A7-671E-4193-804B-8F8B860D38DA}"/>
               </a:ext>
             </a:extLst>
           </p:cNvPr>
@@ -6448,7 +6448,7 @@
           <p:cNvPr id="20" name="">
             <a:extLst xmlns:a="http://schemas.openxmlformats.org/drawingml/2006/main">
               <a:ext uri="{FF2B5EF4-FFF2-40B4-BE49-F238E27FC236}">
-                <a16:creationId xmlns:a16="http://schemas.microsoft.com/office/drawing/2014/main" id="{E4C03DC8-4604-4E7D-8147-5D615C6C1688}"/>
+                <a16:creationId xmlns:a16="http://schemas.microsoft.com/office/drawing/2014/main" id="{B5E2B05D-AC2F-40F3-A9F9-F50A5483A012}"/>
               </a:ext>
             </a:extLst>
           </p:cNvPr>
@@ -6505,7 +6505,7 @@
           <p:cNvPr id="21" name="">
             <a:extLst xmlns:a="http://schemas.openxmlformats.org/drawingml/2006/main">
               <a:ext uri="{FF2B5EF4-FFF2-40B4-BE49-F238E27FC236}">
-                <a16:creationId xmlns:a16="http://schemas.microsoft.com/office/drawing/2014/main" id="{CED63CC4-B102-4045-A96D-BF000C539EEF}"/>
+                <a16:creationId xmlns:a16="http://schemas.microsoft.com/office/drawing/2014/main" id="{F4EE2333-F14B-451F-BE7C-3CCD93DC700B}"/>
               </a:ext>
             </a:extLst>
           </p:cNvPr>
@@ -6562,7 +6562,7 @@
           <p:cNvPr id="22" name="">
             <a:extLst xmlns:a="http://schemas.openxmlformats.org/drawingml/2006/main">
               <a:ext uri="{FF2B5EF4-FFF2-40B4-BE49-F238E27FC236}">
-                <a16:creationId xmlns:a16="http://schemas.microsoft.com/office/drawing/2014/main" id="{364DA29B-69BB-4858-802E-5605159CCED0}"/>
+                <a16:creationId xmlns:a16="http://schemas.microsoft.com/office/drawing/2014/main" id="{507F6B02-F078-483E-B2D6-2DE3719BD5F0}"/>
               </a:ext>
             </a:extLst>
           </p:cNvPr>
@@ -6617,7 +6617,7 @@
     </p:spTree>
     <p:extLst>
       <p:ext uri="{BB962C8B-B14F-4D97-AF65-F5344CB8AC3E}">
-        <p14:creationId xmlns:p14="http://schemas.microsoft.com/office/powerpoint/2010/main" val="744669436"/>
+        <p14:creationId xmlns:p14="http://schemas.microsoft.com/office/powerpoint/2010/main" val="146552520"/>
       </p:ext>
     </p:extLst>
   </p:cSld>
@@ -6818,7 +6818,7 @@
           <p:cNvPr id="16" name="">
             <a:extLst xmlns:a="http://schemas.openxmlformats.org/drawingml/2006/main">
               <a:ext uri="{FF2B5EF4-FFF2-40B4-BE49-F238E27FC236}">
-                <a16:creationId xmlns:a16="http://schemas.microsoft.com/office/drawing/2014/main" id="{25CD6DAA-27D9-4339-94D2-DDB7030EC3D1}"/>
+                <a16:creationId xmlns:a16="http://schemas.microsoft.com/office/drawing/2014/main" id="{ACC563CC-25ED-4E70-9D45-972C75937263}"/>
               </a:ext>
             </a:extLst>
           </p:cNvPr>
@@ -6850,7 +6850,7 @@
           <p:cNvPr id="2" name="">
             <a:extLst xmlns:a="http://schemas.openxmlformats.org/drawingml/2006/main">
               <a:ext uri="{FF2B5EF4-FFF2-40B4-BE49-F238E27FC236}">
-                <a16:creationId xmlns:a16="http://schemas.microsoft.com/office/drawing/2014/main" id="{2892C071-285B-47FF-9A85-D284DEF7A830}"/>
+                <a16:creationId xmlns:a16="http://schemas.microsoft.com/office/drawing/2014/main" id="{B67B2F8E-BBC4-409F-A7F9-0E70D9518393}"/>
               </a:ext>
             </a:extLst>
           </p:cNvPr>
@@ -6907,7 +6907,7 @@
           <p:cNvPr id="3" name="">
             <a:extLst xmlns:a="http://schemas.openxmlformats.org/drawingml/2006/main">
               <a:ext uri="{FF2B5EF4-FFF2-40B4-BE49-F238E27FC236}">
-                <a16:creationId xmlns:a16="http://schemas.microsoft.com/office/drawing/2014/main" id="{0AE2922A-2F01-4922-A97C-E63E277BD467}"/>
+                <a16:creationId xmlns:a16="http://schemas.microsoft.com/office/drawing/2014/main" id="{23328E03-6487-4F2A-913C-8FCD23E8A09B}"/>
               </a:ext>
             </a:extLst>
           </p:cNvPr>
@@ -6939,7 +6939,7 @@
           <p:cNvPr id="4" name="">
             <a:extLst xmlns:a="http://schemas.openxmlformats.org/drawingml/2006/main">
               <a:ext uri="{FF2B5EF4-FFF2-40B4-BE49-F238E27FC236}">
-                <a16:creationId xmlns:a16="http://schemas.microsoft.com/office/drawing/2014/main" id="{15F2EE89-BF77-46B3-8F82-562CE277D11D}"/>
+                <a16:creationId xmlns:a16="http://schemas.microsoft.com/office/drawing/2014/main" id="{ED0EA181-3EA5-4B5D-A6F9-9E809D57A9AD}"/>
               </a:ext>
             </a:extLst>
           </p:cNvPr>
@@ -6996,7 +6996,7 @@
           <p:cNvPr id="5" name="">
             <a:extLst xmlns:a="http://schemas.openxmlformats.org/drawingml/2006/main">
               <a:ext uri="{FF2B5EF4-FFF2-40B4-BE49-F238E27FC236}">
-                <a16:creationId xmlns:a16="http://schemas.microsoft.com/office/drawing/2014/main" id="{2C357D52-10D7-4E5C-A7F5-19C93FFDE520}"/>
+                <a16:creationId xmlns:a16="http://schemas.microsoft.com/office/drawing/2014/main" id="{4C7CE515-3005-4C01-A8A3-0B02D1A33E18}"/>
               </a:ext>
             </a:extLst>
           </p:cNvPr>
@@ -7053,7 +7053,7 @@
           <p:cNvPr id="6" name="">
             <a:extLst xmlns:a="http://schemas.openxmlformats.org/drawingml/2006/main">
               <a:ext uri="{FF2B5EF4-FFF2-40B4-BE49-F238E27FC236}">
-                <a16:creationId xmlns:a16="http://schemas.microsoft.com/office/drawing/2014/main" id="{F67835DC-4558-4651-80E7-58CA55990965}"/>
+                <a16:creationId xmlns:a16="http://schemas.microsoft.com/office/drawing/2014/main" id="{07D1AAC3-3EF5-48DC-A9F8-7285B7D6F083}"/>
               </a:ext>
             </a:extLst>
           </p:cNvPr>
@@ -7110,7 +7110,7 @@
           <p:cNvPr id="7" name="">
             <a:extLst xmlns:a="http://schemas.openxmlformats.org/drawingml/2006/main">
               <a:ext uri="{FF2B5EF4-FFF2-40B4-BE49-F238E27FC236}">
-                <a16:creationId xmlns:a16="http://schemas.microsoft.com/office/drawing/2014/main" id="{33C653F8-D0F8-427E-8A5D-0CAF73B20CAC}"/>
+                <a16:creationId xmlns:a16="http://schemas.microsoft.com/office/drawing/2014/main" id="{AA2AAD32-7768-4B35-8983-B1352C4557AD}"/>
               </a:ext>
             </a:extLst>
           </p:cNvPr>
@@ -7142,7 +7142,7 @@
           <p:cNvPr id="8" name="">
             <a:extLst xmlns:a="http://schemas.openxmlformats.org/drawingml/2006/main">
               <a:ext uri="{FF2B5EF4-FFF2-40B4-BE49-F238E27FC236}">
-                <a16:creationId xmlns:a16="http://schemas.microsoft.com/office/drawing/2014/main" id="{99E33DD3-501A-44F9-86EE-92DB00C881AB}"/>
+                <a16:creationId xmlns:a16="http://schemas.microsoft.com/office/drawing/2014/main" id="{21D75628-68C4-409D-A681-F60208C7514C}"/>
               </a:ext>
             </a:extLst>
           </p:cNvPr>
@@ -7199,7 +7199,7 @@
           <p:cNvPr id="9" name="">
             <a:extLst xmlns:a="http://schemas.openxmlformats.org/drawingml/2006/main">
               <a:ext uri="{FF2B5EF4-FFF2-40B4-BE49-F238E27FC236}">
-                <a16:creationId xmlns:a16="http://schemas.microsoft.com/office/drawing/2014/main" id="{80A5768C-5D0D-4069-8F3A-658F7683A47F}"/>
+                <a16:creationId xmlns:a16="http://schemas.microsoft.com/office/drawing/2014/main" id="{E1FB21CA-C85F-4DC4-AF73-9894019C633D}"/>
               </a:ext>
             </a:extLst>
           </p:cNvPr>
@@ -7256,7 +7256,7 @@
           <p:cNvPr id="10" name="">
             <a:extLst xmlns:a="http://schemas.openxmlformats.org/drawingml/2006/main">
               <a:ext uri="{FF2B5EF4-FFF2-40B4-BE49-F238E27FC236}">
-                <a16:creationId xmlns:a16="http://schemas.microsoft.com/office/drawing/2014/main" id="{5AE5A2CA-FCD3-4C07-A0F7-D931784AB5D2}"/>
+                <a16:creationId xmlns:a16="http://schemas.microsoft.com/office/drawing/2014/main" id="{52736B31-740A-44CD-B415-4649B8DF6AE1}"/>
               </a:ext>
             </a:extLst>
           </p:cNvPr>
@@ -7313,7 +7313,7 @@
           <p:cNvPr id="11" name="">
             <a:extLst xmlns:a="http://schemas.openxmlformats.org/drawingml/2006/main">
               <a:ext uri="{FF2B5EF4-FFF2-40B4-BE49-F238E27FC236}">
-                <a16:creationId xmlns:a16="http://schemas.microsoft.com/office/drawing/2014/main" id="{54B4DCC6-FA65-48B5-BF0A-F9B955068580}"/>
+                <a16:creationId xmlns:a16="http://schemas.microsoft.com/office/drawing/2014/main" id="{25187961-B934-4E41-937C-64869C862F79}"/>
               </a:ext>
             </a:extLst>
           </p:cNvPr>
@@ -7345,7 +7345,7 @@
           <p:cNvPr id="12" name="">
             <a:extLst xmlns:a="http://schemas.openxmlformats.org/drawingml/2006/main">
               <a:ext uri="{FF2B5EF4-FFF2-40B4-BE49-F238E27FC236}">
-                <a16:creationId xmlns:a16="http://schemas.microsoft.com/office/drawing/2014/main" id="{1E186CB9-3329-4CE6-A626-33B5F91285D1}"/>
+                <a16:creationId xmlns:a16="http://schemas.microsoft.com/office/drawing/2014/main" id="{52FB7AAC-0F26-4CD4-84D3-A6D179ABB063}"/>
               </a:ext>
             </a:extLst>
           </p:cNvPr>
@@ -7402,7 +7402,7 @@
           <p:cNvPr id="13" name="">
             <a:extLst xmlns:a="http://schemas.openxmlformats.org/drawingml/2006/main">
               <a:ext uri="{FF2B5EF4-FFF2-40B4-BE49-F238E27FC236}">
-                <a16:creationId xmlns:a16="http://schemas.microsoft.com/office/drawing/2014/main" id="{F92910E2-72A8-494C-B25C-61B312A479F8}"/>
+                <a16:creationId xmlns:a16="http://schemas.microsoft.com/office/drawing/2014/main" id="{699521E9-4E30-4C7B-87B7-8E4A4A08EC40}"/>
               </a:ext>
             </a:extLst>
           </p:cNvPr>
@@ -7459,7 +7459,7 @@
           <p:cNvPr id="14" name="">
             <a:extLst xmlns:a="http://schemas.openxmlformats.org/drawingml/2006/main">
               <a:ext uri="{FF2B5EF4-FFF2-40B4-BE49-F238E27FC236}">
-                <a16:creationId xmlns:a16="http://schemas.microsoft.com/office/drawing/2014/main" id="{E90DB201-4DA2-40A5-8316-B37B13CB5703}"/>
+                <a16:creationId xmlns:a16="http://schemas.microsoft.com/office/drawing/2014/main" id="{DD284984-8E71-4F9C-84F4-7B1295A3717F}"/>
               </a:ext>
             </a:extLst>
           </p:cNvPr>
@@ -7516,7 +7516,7 @@
           <p:cNvPr id="15" name="">
             <a:extLst xmlns:a="http://schemas.openxmlformats.org/drawingml/2006/main">
               <a:ext uri="{FF2B5EF4-FFF2-40B4-BE49-F238E27FC236}">
-                <a16:creationId xmlns:a16="http://schemas.microsoft.com/office/drawing/2014/main" id="{533AE525-275D-4442-8A71-A33FBBA520A6}"/>
+                <a16:creationId xmlns:a16="http://schemas.microsoft.com/office/drawing/2014/main" id="{FB13728A-C1B6-4E23-875F-50BDB8D4B5EF}"/>
               </a:ext>
             </a:extLst>
           </p:cNvPr>
@@ -7571,7 +7571,7 @@
     </p:spTree>
     <p:extLst>
       <p:ext uri="{BB962C8B-B14F-4D97-AF65-F5344CB8AC3E}">
-        <p14:creationId xmlns:p14="http://schemas.microsoft.com/office/powerpoint/2010/main" val="1135687138"/>
+        <p14:creationId xmlns:p14="http://schemas.microsoft.com/office/powerpoint/2010/main" val="874965390"/>
       </p:ext>
     </p:extLst>
   </p:cSld>
@@ -7769,10 +7769,10 @@
       </p:grpSpPr>
       <p:sp>
         <p:nvSpPr>
-          <p:cNvPr id="23" name="">
-            <a:extLst xmlns:a="http://schemas.openxmlformats.org/drawingml/2006/main">
-              <a:ext uri="{FF2B5EF4-FFF2-40B4-BE49-F238E27FC236}">
-                <a16:creationId xmlns:a16="http://schemas.microsoft.com/office/drawing/2014/main" id="{EE003D74-F1EE-4ECE-B208-3F8322A2193F}"/>
+          <p:cNvPr id="26" name="">
+            <a:extLst xmlns:a="http://schemas.openxmlformats.org/drawingml/2006/main">
+              <a:ext uri="{FF2B5EF4-FFF2-40B4-BE49-F238E27FC236}">
+                <a16:creationId xmlns:a16="http://schemas.microsoft.com/office/drawing/2014/main" id="{64ECD220-BBBD-4579-8866-45C595280832}"/>
               </a:ext>
             </a:extLst>
           </p:cNvPr>
@@ -7804,7 +7804,7 @@
           <p:cNvPr id="2" name="">
             <a:extLst xmlns:a="http://schemas.openxmlformats.org/drawingml/2006/main">
               <a:ext uri="{FF2B5EF4-FFF2-40B4-BE49-F238E27FC236}">
-                <a16:creationId xmlns:a16="http://schemas.microsoft.com/office/drawing/2014/main" id="{A4A55ADE-0B27-4342-882B-3D487AAAE8D6}"/>
+                <a16:creationId xmlns:a16="http://schemas.microsoft.com/office/drawing/2014/main" id="{AB920268-42C1-4540-8EAA-E6C97C24B408}"/>
               </a:ext>
             </a:extLst>
           </p:cNvPr>
@@ -7861,7 +7861,7 @@
           <p:cNvPr id="3" name="">
             <a:extLst xmlns:a="http://schemas.openxmlformats.org/drawingml/2006/main">
               <a:ext uri="{FF2B5EF4-FFF2-40B4-BE49-F238E27FC236}">
-                <a16:creationId xmlns:a16="http://schemas.microsoft.com/office/drawing/2014/main" id="{1A1B6F0A-29F3-4933-B6E6-CA940B29F6E5}"/>
+                <a16:creationId xmlns:a16="http://schemas.microsoft.com/office/drawing/2014/main" id="{ADB2E81B-F44F-4E70-B857-36A40538D692}"/>
               </a:ext>
             </a:extLst>
           </p:cNvPr>
@@ -7893,7 +7893,7 @@
           <p:cNvPr id="4" name="">
             <a:extLst xmlns:a="http://schemas.openxmlformats.org/drawingml/2006/main">
               <a:ext uri="{FF2B5EF4-FFF2-40B4-BE49-F238E27FC236}">
-                <a16:creationId xmlns:a16="http://schemas.microsoft.com/office/drawing/2014/main" id="{BE03D693-7527-4822-9451-0A0D3C92BC61}"/>
+                <a16:creationId xmlns:a16="http://schemas.microsoft.com/office/drawing/2014/main" id="{EF70BD30-F839-4F81-8500-F945B9DD0C1B}"/>
               </a:ext>
             </a:extLst>
           </p:cNvPr>
@@ -7950,7 +7950,7 @@
           <p:cNvPr id="5" name="">
             <a:extLst xmlns:a="http://schemas.openxmlformats.org/drawingml/2006/main">
               <a:ext uri="{FF2B5EF4-FFF2-40B4-BE49-F238E27FC236}">
-                <a16:creationId xmlns:a16="http://schemas.microsoft.com/office/drawing/2014/main" id="{9B95EDA6-9581-4444-AC2D-4393730031EB}"/>
+                <a16:creationId xmlns:a16="http://schemas.microsoft.com/office/drawing/2014/main" id="{F94A70EC-9311-4DC7-90F3-24F7181AA4B7}"/>
               </a:ext>
             </a:extLst>
           </p:cNvPr>
@@ -8007,7 +8007,7 @@
           <p:cNvPr id="6" name="">
             <a:extLst xmlns:a="http://schemas.openxmlformats.org/drawingml/2006/main">
               <a:ext uri="{FF2B5EF4-FFF2-40B4-BE49-F238E27FC236}">
-                <a16:creationId xmlns:a16="http://schemas.microsoft.com/office/drawing/2014/main" id="{AE25A3AF-7A07-4909-99D9-0EA73EF5A87D}"/>
+                <a16:creationId xmlns:a16="http://schemas.microsoft.com/office/drawing/2014/main" id="{1CD6F00D-3E32-4725-B38C-F6829645C155}"/>
               </a:ext>
             </a:extLst>
           </p:cNvPr>
@@ -8064,7 +8064,7 @@
           <p:cNvPr id="7" name="">
             <a:extLst xmlns:a="http://schemas.openxmlformats.org/drawingml/2006/main">
               <a:ext uri="{FF2B5EF4-FFF2-40B4-BE49-F238E27FC236}">
-                <a16:creationId xmlns:a16="http://schemas.microsoft.com/office/drawing/2014/main" id="{8F517F40-7D0D-461E-A7E7-15B7A97F1D00}"/>
+                <a16:creationId xmlns:a16="http://schemas.microsoft.com/office/drawing/2014/main" id="{330B7A1E-99E1-4DF3-BA52-DD25BFD50FEF}"/>
               </a:ext>
             </a:extLst>
           </p:cNvPr>
@@ -8096,7 +8096,7 @@
           <p:cNvPr id="8" name="">
             <a:extLst xmlns:a="http://schemas.openxmlformats.org/drawingml/2006/main">
               <a:ext uri="{FF2B5EF4-FFF2-40B4-BE49-F238E27FC236}">
-                <a16:creationId xmlns:a16="http://schemas.microsoft.com/office/drawing/2014/main" id="{CCCCEF35-1016-4B52-A1CD-3E7047C62CD6}"/>
+                <a16:creationId xmlns:a16="http://schemas.microsoft.com/office/drawing/2014/main" id="{05DDD8DA-FE75-4742-BA78-F6A15B0267E6}"/>
               </a:ext>
             </a:extLst>
           </p:cNvPr>
@@ -8153,7 +8153,7 @@
           <p:cNvPr id="9" name="">
             <a:extLst xmlns:a="http://schemas.openxmlformats.org/drawingml/2006/main">
               <a:ext uri="{FF2B5EF4-FFF2-40B4-BE49-F238E27FC236}">
-                <a16:creationId xmlns:a16="http://schemas.microsoft.com/office/drawing/2014/main" id="{9A286D21-84EA-4ABF-8440-86D68E843A60}"/>
+                <a16:creationId xmlns:a16="http://schemas.microsoft.com/office/drawing/2014/main" id="{6E43AE12-54D1-4E7E-995F-28B2B75D88B1}"/>
               </a:ext>
             </a:extLst>
           </p:cNvPr>
@@ -8210,19 +8210,19 @@
           <p:cNvPr id="10" name="">
             <a:extLst xmlns:a="http://schemas.openxmlformats.org/drawingml/2006/main">
               <a:ext uri="{FF2B5EF4-FFF2-40B4-BE49-F238E27FC236}">
-                <a16:creationId xmlns:a16="http://schemas.microsoft.com/office/drawing/2014/main" id="{E3B85DE0-63B3-4564-AF74-280DA432F5B7}"/>
-              </a:ext>
-            </a:extLst>
-          </p:cNvPr>
-          <p:cNvSpPr>
-            <a:spLocks xmlns:a="http://schemas.openxmlformats.org/drawingml/2006/main" noGrp="1"/>
-          </p:cNvSpPr>
-          <p:nvPr/>
-        </p:nvSpPr>
-        <p:spPr>
-          <a:xfrm xmlns:a="http://schemas.openxmlformats.org/drawingml/2006/main">
-            <a:off x="914400" y="1257300"/>
-            <a:ext cx="10363200" cy="781050"/>
+                <a16:creationId xmlns:a16="http://schemas.microsoft.com/office/drawing/2014/main" id="{138B296F-E376-413D-B204-BD916F156737}"/>
+              </a:ext>
+            </a:extLst>
+          </p:cNvPr>
+          <p:cNvSpPr>
+            <a:spLocks xmlns:a="http://schemas.openxmlformats.org/drawingml/2006/main" noGrp="1"/>
+          </p:cNvSpPr>
+          <p:nvPr/>
+        </p:nvSpPr>
+        <p:spPr>
+          <a:xfrm xmlns:a="http://schemas.openxmlformats.org/drawingml/2006/main">
+            <a:off x="857250" y="1219200"/>
+            <a:ext cx="10477500" cy="742950"/>
           </a:xfrm>
           <a:prstGeom xmlns:a="http://schemas.openxmlformats.org/drawingml/2006/main" prst="rect">
             <a:avLst/>
@@ -8239,7 +8239,7 @@
           <a:lstStyle xmlns:a="http://schemas.openxmlformats.org/drawingml/2006/main"/>
           <a:p xmlns:a="http://schemas.openxmlformats.org/drawingml/2006/main">
             <a:pPr algn="ctr">
-              <a:defRPr sz="2175" b="1">
+              <a:defRPr sz="2100" b="1">
                 <a:solidFill>
                   <a:srgbClr val="17253A"/>
                 </a:solidFill>
@@ -8249,7 +8249,7 @@
               </a:defRPr>
             </a:pPr>
             <a:r>
-              <a:rPr sz="2175" b="1">
+              <a:rPr sz="2100" b="1">
                 <a:solidFill>
                   <a:srgbClr val="17253A"/>
                 </a:solidFill>
@@ -8267,28 +8267,30 @@
           <p:cNvPr id="11" name="">
             <a:extLst xmlns:a="http://schemas.openxmlformats.org/drawingml/2006/main">
               <a:ext uri="{FF2B5EF4-FFF2-40B4-BE49-F238E27FC236}">
-                <a16:creationId xmlns:a16="http://schemas.microsoft.com/office/drawing/2014/main" id="{55BDCDB1-E8E6-4573-9669-646C74BC596D}"/>
-              </a:ext>
-            </a:extLst>
-          </p:cNvPr>
-          <p:cNvSpPr>
-            <a:spLocks xmlns:a="http://schemas.openxmlformats.org/drawingml/2006/main" noGrp="1"/>
-          </p:cNvSpPr>
-          <p:nvPr/>
-        </p:nvSpPr>
-        <p:spPr>
-          <a:xfrm xmlns:a="http://schemas.openxmlformats.org/drawingml/2006/main">
-            <a:off x="1000125" y="2247900"/>
-            <a:ext cx="476250" cy="476250"/>
-          </a:xfrm>
-          <a:prstGeom xmlns:a="http://schemas.openxmlformats.org/drawingml/2006/main" prst="ellipse">
+                <a16:creationId xmlns:a16="http://schemas.microsoft.com/office/drawing/2014/main" id="{38C6B524-5734-4C94-820A-42E6DFD040FF}"/>
+              </a:ext>
+            </a:extLst>
+          </p:cNvPr>
+          <p:cNvSpPr>
+            <a:spLocks xmlns:a="http://schemas.openxmlformats.org/drawingml/2006/main" noGrp="1"/>
+          </p:cNvSpPr>
+          <p:nvPr/>
+        </p:nvSpPr>
+        <p:spPr>
+          <a:xfrm xmlns:a="http://schemas.openxmlformats.org/drawingml/2006/main">
+            <a:off x="971550" y="2124075"/>
+            <a:ext cx="38100" cy="3524250"/>
+          </a:xfrm>
+          <a:prstGeom xmlns:a="http://schemas.openxmlformats.org/drawingml/2006/main" prst="rect">
             <a:avLst/>
           </a:prstGeom>
           <a:solidFill xmlns:a="http://schemas.openxmlformats.org/drawingml/2006/main">
-            <a:srgbClr val="18324A"/>
+            <a:srgbClr val="2C6E73"/>
           </a:solidFill>
           <a:ln xmlns:a="http://schemas.openxmlformats.org/drawingml/2006/main" w="0">
-            <a:noFill/>
+            <a:solidFill>
+              <a:srgbClr val="2C6E73"/>
+            </a:solidFill>
           </a:ln>
         </p:spPr>
       </p:sp>
@@ -8297,19 +8299,19 @@
           <p:cNvPr id="12" name="">
             <a:extLst xmlns:a="http://schemas.openxmlformats.org/drawingml/2006/main">
               <a:ext uri="{FF2B5EF4-FFF2-40B4-BE49-F238E27FC236}">
-                <a16:creationId xmlns:a16="http://schemas.microsoft.com/office/drawing/2014/main" id="{A5A4B206-FA18-4C60-B7D1-C34307FBAD47}"/>
-              </a:ext>
-            </a:extLst>
-          </p:cNvPr>
-          <p:cNvSpPr>
-            <a:spLocks xmlns:a="http://schemas.openxmlformats.org/drawingml/2006/main" noGrp="1"/>
-          </p:cNvSpPr>
-          <p:nvPr/>
-        </p:nvSpPr>
-        <p:spPr>
-          <a:xfrm xmlns:a="http://schemas.openxmlformats.org/drawingml/2006/main">
-            <a:off x="1000125" y="2276475"/>
-            <a:ext cx="476250" cy="419100"/>
+                <a16:creationId xmlns:a16="http://schemas.microsoft.com/office/drawing/2014/main" id="{5F294A87-DBDC-4FE0-A4F3-117205BAF8AC}"/>
+              </a:ext>
+            </a:extLst>
+          </p:cNvPr>
+          <p:cNvSpPr>
+            <a:spLocks xmlns:a="http://schemas.openxmlformats.org/drawingml/2006/main" noGrp="1"/>
+          </p:cNvSpPr>
+          <p:nvPr/>
+        </p:nvSpPr>
+        <p:spPr>
+          <a:xfrm xmlns:a="http://schemas.openxmlformats.org/drawingml/2006/main">
+            <a:off x="1162050" y="2200275"/>
+            <a:ext cx="400050" cy="400050"/>
           </a:xfrm>
           <a:prstGeom xmlns:a="http://schemas.openxmlformats.org/drawingml/2006/main" prst="rect">
             <a:avLst/>
@@ -8326,9 +8328,9 @@
           <a:lstStyle xmlns:a="http://schemas.openxmlformats.org/drawingml/2006/main"/>
           <a:p xmlns:a="http://schemas.openxmlformats.org/drawingml/2006/main">
             <a:pPr algn="ctr">
-              <a:defRPr sz="1350" b="1">
-                <a:solidFill>
-                  <a:srgbClr val="FFFFFF"/>
+              <a:defRPr sz="1125" b="1">
+                <a:solidFill>
+                  <a:srgbClr val="2C6E73"/>
                 </a:solidFill>
                 <a:latin typeface="Arial"/>
                 <a:ea typeface="Arial"/>
@@ -8336,9 +8338,9 @@
               </a:defRPr>
             </a:pPr>
             <a:r>
-              <a:rPr sz="1350" b="1">
-                <a:solidFill>
-                  <a:srgbClr val="FFFFFF"/>
+              <a:rPr sz="1125" b="1">
+                <a:solidFill>
+                  <a:srgbClr val="2C6E73"/>
                 </a:solidFill>
                 <a:latin typeface="Arial"/>
                 <a:ea typeface="Arial"/>
@@ -8354,19 +8356,19 @@
           <p:cNvPr id="13" name="">
             <a:extLst xmlns:a="http://schemas.openxmlformats.org/drawingml/2006/main">
               <a:ext uri="{FF2B5EF4-FFF2-40B4-BE49-F238E27FC236}">
-                <a16:creationId xmlns:a16="http://schemas.microsoft.com/office/drawing/2014/main" id="{60B47B3F-53CE-4339-9A05-12F2A0C15BC3}"/>
-              </a:ext>
-            </a:extLst>
-          </p:cNvPr>
-          <p:cNvSpPr>
-            <a:spLocks xmlns:a="http://schemas.openxmlformats.org/drawingml/2006/main" noGrp="1"/>
-          </p:cNvSpPr>
-          <p:nvPr/>
-        </p:nvSpPr>
-        <p:spPr>
-          <a:xfrm xmlns:a="http://schemas.openxmlformats.org/drawingml/2006/main">
-            <a:off x="1714500" y="2181225"/>
-            <a:ext cx="9429750" cy="609600"/>
+                <a16:creationId xmlns:a16="http://schemas.microsoft.com/office/drawing/2014/main" id="{51E38D52-0E92-43B1-BBF4-34E87A48A4B8}"/>
+              </a:ext>
+            </a:extLst>
+          </p:cNvPr>
+          <p:cNvSpPr>
+            <a:spLocks xmlns:a="http://schemas.openxmlformats.org/drawingml/2006/main" noGrp="1"/>
+          </p:cNvSpPr>
+          <p:nvPr/>
+        </p:nvSpPr>
+        <p:spPr>
+          <a:xfrm xmlns:a="http://schemas.openxmlformats.org/drawingml/2006/main">
+            <a:off x="1714500" y="2114550"/>
+            <a:ext cx="9525000" cy="638175"/>
           </a:xfrm>
           <a:prstGeom xmlns:a="http://schemas.openxmlformats.org/drawingml/2006/main" prst="rect">
             <a:avLst/>
@@ -8383,7 +8385,7 @@
           <a:lstStyle xmlns:a="http://schemas.openxmlformats.org/drawingml/2006/main"/>
           <a:p xmlns:a="http://schemas.openxmlformats.org/drawingml/2006/main">
             <a:pPr algn="l">
-              <a:defRPr sz="1500" b="0">
+              <a:defRPr sz="1575" b="0">
                 <a:solidFill>
                   <a:srgbClr val="17253A"/>
                 </a:solidFill>
@@ -8393,7 +8395,7 @@
               </a:defRPr>
             </a:pPr>
             <a:r>
-              <a:rPr sz="1500" b="0">
+              <a:rPr sz="1575" b="0">
                 <a:solidFill>
                   <a:srgbClr val="17253A"/>
                 </a:solidFill>
@@ -8401,7 +8403,7 @@
                 <a:ea typeface="Arial"/>
                 <a:cs typeface="Arial"/>
               </a:rPr>
-              <a:t>Identify the structure: Convert mixed numbers to improper fractions when needed.</a:t>
+              <a:t>2/3 × 9/10</a:t>
             </a:r>
           </a:p>
         </p:txBody>
@@ -8411,28 +8413,30 @@
           <p:cNvPr id="14" name="">
             <a:extLst xmlns:a="http://schemas.openxmlformats.org/drawingml/2006/main">
               <a:ext uri="{FF2B5EF4-FFF2-40B4-BE49-F238E27FC236}">
-                <a16:creationId xmlns:a16="http://schemas.microsoft.com/office/drawing/2014/main" id="{B84949BB-C337-4859-8EF1-2CA1589DB2E0}"/>
-              </a:ext>
-            </a:extLst>
-          </p:cNvPr>
-          <p:cNvSpPr>
-            <a:spLocks xmlns:a="http://schemas.openxmlformats.org/drawingml/2006/main" noGrp="1"/>
-          </p:cNvSpPr>
-          <p:nvPr/>
-        </p:nvSpPr>
-        <p:spPr>
-          <a:xfrm xmlns:a="http://schemas.openxmlformats.org/drawingml/2006/main">
-            <a:off x="1000125" y="2990850"/>
-            <a:ext cx="476250" cy="476250"/>
-          </a:xfrm>
-          <a:prstGeom xmlns:a="http://schemas.openxmlformats.org/drawingml/2006/main" prst="ellipse">
+                <a16:creationId xmlns:a16="http://schemas.microsoft.com/office/drawing/2014/main" id="{60EF61C0-DC7D-4D7F-A766-1D7211C4103B}"/>
+              </a:ext>
+            </a:extLst>
+          </p:cNvPr>
+          <p:cNvSpPr>
+            <a:spLocks xmlns:a="http://schemas.openxmlformats.org/drawingml/2006/main" noGrp="1"/>
+          </p:cNvSpPr>
+          <p:nvPr/>
+        </p:nvSpPr>
+        <p:spPr>
+          <a:xfrm xmlns:a="http://schemas.openxmlformats.org/drawingml/2006/main">
+            <a:off x="1714500" y="2771775"/>
+            <a:ext cx="9334500" cy="9525"/>
+          </a:xfrm>
+          <a:prstGeom xmlns:a="http://schemas.openxmlformats.org/drawingml/2006/main" prst="rect">
             <a:avLst/>
           </a:prstGeom>
           <a:solidFill xmlns:a="http://schemas.openxmlformats.org/drawingml/2006/main">
-            <a:srgbClr val="2C6E73"/>
+            <a:srgbClr val="D9E0E6"/>
           </a:solidFill>
           <a:ln xmlns:a="http://schemas.openxmlformats.org/drawingml/2006/main" w="0">
-            <a:noFill/>
+            <a:solidFill>
+              <a:srgbClr val="D9E0E6"/>
+            </a:solidFill>
           </a:ln>
         </p:spPr>
       </p:sp>
@@ -8441,19 +8445,19 @@
           <p:cNvPr id="15" name="">
             <a:extLst xmlns:a="http://schemas.openxmlformats.org/drawingml/2006/main">
               <a:ext uri="{FF2B5EF4-FFF2-40B4-BE49-F238E27FC236}">
-                <a16:creationId xmlns:a16="http://schemas.microsoft.com/office/drawing/2014/main" id="{8034C49C-B3FB-4F89-9722-3B9232258C1F}"/>
-              </a:ext>
-            </a:extLst>
-          </p:cNvPr>
-          <p:cNvSpPr>
-            <a:spLocks xmlns:a="http://schemas.openxmlformats.org/drawingml/2006/main" noGrp="1"/>
-          </p:cNvSpPr>
-          <p:nvPr/>
-        </p:nvSpPr>
-        <p:spPr>
-          <a:xfrm xmlns:a="http://schemas.openxmlformats.org/drawingml/2006/main">
-            <a:off x="1000125" y="3019425"/>
-            <a:ext cx="476250" cy="419100"/>
+                <a16:creationId xmlns:a16="http://schemas.microsoft.com/office/drawing/2014/main" id="{41333B1E-2EB0-49B6-8BE1-FD79C1BC14BE}"/>
+              </a:ext>
+            </a:extLst>
+          </p:cNvPr>
+          <p:cNvSpPr>
+            <a:spLocks xmlns:a="http://schemas.openxmlformats.org/drawingml/2006/main" noGrp="1"/>
+          </p:cNvSpPr>
+          <p:nvPr/>
+        </p:nvSpPr>
+        <p:spPr>
+          <a:xfrm xmlns:a="http://schemas.openxmlformats.org/drawingml/2006/main">
+            <a:off x="1162050" y="2905125"/>
+            <a:ext cx="400050" cy="400050"/>
           </a:xfrm>
           <a:prstGeom xmlns:a="http://schemas.openxmlformats.org/drawingml/2006/main" prst="rect">
             <a:avLst/>
@@ -8470,9 +8474,9 @@
           <a:lstStyle xmlns:a="http://schemas.openxmlformats.org/drawingml/2006/main"/>
           <a:p xmlns:a="http://schemas.openxmlformats.org/drawingml/2006/main">
             <a:pPr algn="ctr">
-              <a:defRPr sz="1350" b="1">
-                <a:solidFill>
-                  <a:srgbClr val="FFFFFF"/>
+              <a:defRPr sz="1125" b="1">
+                <a:solidFill>
+                  <a:srgbClr val="2C6E73"/>
                 </a:solidFill>
                 <a:latin typeface="Arial"/>
                 <a:ea typeface="Arial"/>
@@ -8480,9 +8484,9 @@
               </a:defRPr>
             </a:pPr>
             <a:r>
-              <a:rPr sz="1350" b="1">
-                <a:solidFill>
-                  <a:srgbClr val="FFFFFF"/>
+              <a:rPr sz="1125" b="1">
+                <a:solidFill>
+                  <a:srgbClr val="2C6E73"/>
                 </a:solidFill>
                 <a:latin typeface="Arial"/>
                 <a:ea typeface="Arial"/>
@@ -8498,19 +8502,19 @@
           <p:cNvPr id="16" name="">
             <a:extLst xmlns:a="http://schemas.openxmlformats.org/drawingml/2006/main">
               <a:ext uri="{FF2B5EF4-FFF2-40B4-BE49-F238E27FC236}">
-                <a16:creationId xmlns:a16="http://schemas.microsoft.com/office/drawing/2014/main" id="{42434B8E-B614-40C5-B3B2-1510FB4990E2}"/>
-              </a:ext>
-            </a:extLst>
-          </p:cNvPr>
-          <p:cNvSpPr>
-            <a:spLocks xmlns:a="http://schemas.openxmlformats.org/drawingml/2006/main" noGrp="1"/>
-          </p:cNvSpPr>
-          <p:nvPr/>
-        </p:nvSpPr>
-        <p:spPr>
-          <a:xfrm xmlns:a="http://schemas.openxmlformats.org/drawingml/2006/main">
-            <a:off x="1714500" y="2924175"/>
-            <a:ext cx="9429750" cy="609600"/>
+                <a16:creationId xmlns:a16="http://schemas.microsoft.com/office/drawing/2014/main" id="{7B0F88D4-DEFA-4735-8A24-3C1B781C5A39}"/>
+              </a:ext>
+            </a:extLst>
+          </p:cNvPr>
+          <p:cNvSpPr>
+            <a:spLocks xmlns:a="http://schemas.openxmlformats.org/drawingml/2006/main" noGrp="1"/>
+          </p:cNvSpPr>
+          <p:nvPr/>
+        </p:nvSpPr>
+        <p:spPr>
+          <a:xfrm xmlns:a="http://schemas.openxmlformats.org/drawingml/2006/main">
+            <a:off x="1714500" y="2819400"/>
+            <a:ext cx="9525000" cy="638175"/>
           </a:xfrm>
           <a:prstGeom xmlns:a="http://schemas.openxmlformats.org/drawingml/2006/main" prst="rect">
             <a:avLst/>
@@ -8527,7 +8531,7 @@
           <a:lstStyle xmlns:a="http://schemas.openxmlformats.org/drawingml/2006/main"/>
           <a:p xmlns:a="http://schemas.openxmlformats.org/drawingml/2006/main">
             <a:pPr algn="l">
-              <a:defRPr sz="1500" b="0">
+              <a:defRPr sz="1575" b="0">
                 <a:solidFill>
                   <a:srgbClr val="17253A"/>
                 </a:solidFill>
@@ -8537,7 +8541,7 @@
               </a:defRPr>
             </a:pPr>
             <a:r>
-              <a:rPr sz="1500" b="0">
+              <a:rPr sz="1575" b="0">
                 <a:solidFill>
                   <a:srgbClr val="17253A"/>
                 </a:solidFill>
@@ -8545,7 +8549,7 @@
                 <a:ea typeface="Arial"/>
                 <a:cs typeface="Arial"/>
               </a:rPr>
-              <a:t>Set up the method: Multiply numerators and denominators, cancelling common factors efficiently.</a:t>
+              <a:t>Cancel 2 with 10: 2/10 = 1/5</a:t>
             </a:r>
           </a:p>
         </p:txBody>
@@ -8555,28 +8559,30 @@
           <p:cNvPr id="17" name="">
             <a:extLst xmlns:a="http://schemas.openxmlformats.org/drawingml/2006/main">
               <a:ext uri="{FF2B5EF4-FFF2-40B4-BE49-F238E27FC236}">
-                <a16:creationId xmlns:a16="http://schemas.microsoft.com/office/drawing/2014/main" id="{F7FA89E7-900B-45C2-ADF6-60F828BEEB62}"/>
-              </a:ext>
-            </a:extLst>
-          </p:cNvPr>
-          <p:cNvSpPr>
-            <a:spLocks xmlns:a="http://schemas.openxmlformats.org/drawingml/2006/main" noGrp="1"/>
-          </p:cNvSpPr>
-          <p:nvPr/>
-        </p:nvSpPr>
-        <p:spPr>
-          <a:xfrm xmlns:a="http://schemas.openxmlformats.org/drawingml/2006/main">
-            <a:off x="1000125" y="3733800"/>
-            <a:ext cx="476250" cy="476250"/>
-          </a:xfrm>
-          <a:prstGeom xmlns:a="http://schemas.openxmlformats.org/drawingml/2006/main" prst="ellipse">
+                <a16:creationId xmlns:a16="http://schemas.microsoft.com/office/drawing/2014/main" id="{C4C3300D-0092-4F05-BDB1-63BF23A932F2}"/>
+              </a:ext>
+            </a:extLst>
+          </p:cNvPr>
+          <p:cNvSpPr>
+            <a:spLocks xmlns:a="http://schemas.openxmlformats.org/drawingml/2006/main" noGrp="1"/>
+          </p:cNvSpPr>
+          <p:nvPr/>
+        </p:nvSpPr>
+        <p:spPr>
+          <a:xfrm xmlns:a="http://schemas.openxmlformats.org/drawingml/2006/main">
+            <a:off x="1714500" y="3476625"/>
+            <a:ext cx="9334500" cy="9525"/>
+          </a:xfrm>
+          <a:prstGeom xmlns:a="http://schemas.openxmlformats.org/drawingml/2006/main" prst="rect">
             <a:avLst/>
           </a:prstGeom>
           <a:solidFill xmlns:a="http://schemas.openxmlformats.org/drawingml/2006/main">
-            <a:srgbClr val="2C6E73"/>
+            <a:srgbClr val="D9E0E6"/>
           </a:solidFill>
           <a:ln xmlns:a="http://schemas.openxmlformats.org/drawingml/2006/main" w="0">
-            <a:noFill/>
+            <a:solidFill>
+              <a:srgbClr val="D9E0E6"/>
+            </a:solidFill>
           </a:ln>
         </p:spPr>
       </p:sp>
@@ -8585,19 +8591,19 @@
           <p:cNvPr id="18" name="">
             <a:extLst xmlns:a="http://schemas.openxmlformats.org/drawingml/2006/main">
               <a:ext uri="{FF2B5EF4-FFF2-40B4-BE49-F238E27FC236}">
-                <a16:creationId xmlns:a16="http://schemas.microsoft.com/office/drawing/2014/main" id="{78284FB4-CBD3-46BC-B6DE-37A34C6861BB}"/>
-              </a:ext>
-            </a:extLst>
-          </p:cNvPr>
-          <p:cNvSpPr>
-            <a:spLocks xmlns:a="http://schemas.openxmlformats.org/drawingml/2006/main" noGrp="1"/>
-          </p:cNvSpPr>
-          <p:nvPr/>
-        </p:nvSpPr>
-        <p:spPr>
-          <a:xfrm xmlns:a="http://schemas.openxmlformats.org/drawingml/2006/main">
-            <a:off x="1000125" y="3762375"/>
-            <a:ext cx="476250" cy="419100"/>
+                <a16:creationId xmlns:a16="http://schemas.microsoft.com/office/drawing/2014/main" id="{EAE376CA-73F2-496D-819D-AAF44CEFFCA8}"/>
+              </a:ext>
+            </a:extLst>
+          </p:cNvPr>
+          <p:cNvSpPr>
+            <a:spLocks xmlns:a="http://schemas.openxmlformats.org/drawingml/2006/main" noGrp="1"/>
+          </p:cNvSpPr>
+          <p:nvPr/>
+        </p:nvSpPr>
+        <p:spPr>
+          <a:xfrm xmlns:a="http://schemas.openxmlformats.org/drawingml/2006/main">
+            <a:off x="1162050" y="3609975"/>
+            <a:ext cx="400050" cy="400050"/>
           </a:xfrm>
           <a:prstGeom xmlns:a="http://schemas.openxmlformats.org/drawingml/2006/main" prst="rect">
             <a:avLst/>
@@ -8614,9 +8620,9 @@
           <a:lstStyle xmlns:a="http://schemas.openxmlformats.org/drawingml/2006/main"/>
           <a:p xmlns:a="http://schemas.openxmlformats.org/drawingml/2006/main">
             <a:pPr algn="ctr">
-              <a:defRPr sz="1350" b="1">
-                <a:solidFill>
-                  <a:srgbClr val="FFFFFF"/>
+              <a:defRPr sz="1125" b="1">
+                <a:solidFill>
+                  <a:srgbClr val="2C6E73"/>
                 </a:solidFill>
                 <a:latin typeface="Arial"/>
                 <a:ea typeface="Arial"/>
@@ -8624,9 +8630,9 @@
               </a:defRPr>
             </a:pPr>
             <a:r>
-              <a:rPr sz="1350" b="1">
-                <a:solidFill>
-                  <a:srgbClr val="FFFFFF"/>
+              <a:rPr sz="1125" b="1">
+                <a:solidFill>
+                  <a:srgbClr val="2C6E73"/>
                 </a:solidFill>
                 <a:latin typeface="Arial"/>
                 <a:ea typeface="Arial"/>
@@ -8642,19 +8648,19 @@
           <p:cNvPr id="19" name="">
             <a:extLst xmlns:a="http://schemas.openxmlformats.org/drawingml/2006/main">
               <a:ext uri="{FF2B5EF4-FFF2-40B4-BE49-F238E27FC236}">
-                <a16:creationId xmlns:a16="http://schemas.microsoft.com/office/drawing/2014/main" id="{C5F00905-2E63-4D29-9FAF-24BE5A5A4E2D}"/>
-              </a:ext>
-            </a:extLst>
-          </p:cNvPr>
-          <p:cNvSpPr>
-            <a:spLocks xmlns:a="http://schemas.openxmlformats.org/drawingml/2006/main" noGrp="1"/>
-          </p:cNvSpPr>
-          <p:nvPr/>
-        </p:nvSpPr>
-        <p:spPr>
-          <a:xfrm xmlns:a="http://schemas.openxmlformats.org/drawingml/2006/main">
-            <a:off x="1714500" y="3667125"/>
-            <a:ext cx="9429750" cy="609600"/>
+                <a16:creationId xmlns:a16="http://schemas.microsoft.com/office/drawing/2014/main" id="{43EEDFFD-67FB-4462-BE1C-24224C05F875}"/>
+              </a:ext>
+            </a:extLst>
+          </p:cNvPr>
+          <p:cNvSpPr>
+            <a:spLocks xmlns:a="http://schemas.openxmlformats.org/drawingml/2006/main" noGrp="1"/>
+          </p:cNvSpPr>
+          <p:nvPr/>
+        </p:nvSpPr>
+        <p:spPr>
+          <a:xfrm xmlns:a="http://schemas.openxmlformats.org/drawingml/2006/main">
+            <a:off x="1714500" y="3524250"/>
+            <a:ext cx="9525000" cy="638175"/>
           </a:xfrm>
           <a:prstGeom xmlns:a="http://schemas.openxmlformats.org/drawingml/2006/main" prst="rect">
             <a:avLst/>
@@ -8671,7 +8677,7 @@
           <a:lstStyle xmlns:a="http://schemas.openxmlformats.org/drawingml/2006/main"/>
           <a:p xmlns:a="http://schemas.openxmlformats.org/drawingml/2006/main">
             <a:pPr algn="l">
-              <a:defRPr sz="1500" b="0">
+              <a:defRPr sz="1575" b="0">
                 <a:solidFill>
                   <a:srgbClr val="17253A"/>
                 </a:solidFill>
@@ -8681,7 +8687,7 @@
               </a:defRPr>
             </a:pPr>
             <a:r>
-              <a:rPr sz="1500" b="0">
+              <a:rPr sz="1575" b="0">
                 <a:solidFill>
                   <a:srgbClr val="17253A"/>
                 </a:solidFill>
@@ -8689,7 +8695,7 @@
                 <a:ea typeface="Arial"/>
                 <a:cs typeface="Arial"/>
               </a:rPr>
-              <a:t>Complete the calculation: 3/5.</a:t>
+              <a:t>Cancel 9 with 3: 9/3 = 3/1</a:t>
             </a:r>
           </a:p>
         </p:txBody>
@@ -8699,28 +8705,30 @@
           <p:cNvPr id="20" name="">
             <a:extLst xmlns:a="http://schemas.openxmlformats.org/drawingml/2006/main">
               <a:ext uri="{FF2B5EF4-FFF2-40B4-BE49-F238E27FC236}">
-                <a16:creationId xmlns:a16="http://schemas.microsoft.com/office/drawing/2014/main" id="{62DC5A79-D17A-4E6A-88AF-DF52DD80146A}"/>
-              </a:ext>
-            </a:extLst>
-          </p:cNvPr>
-          <p:cNvSpPr>
-            <a:spLocks xmlns:a="http://schemas.openxmlformats.org/drawingml/2006/main" noGrp="1"/>
-          </p:cNvSpPr>
-          <p:nvPr/>
-        </p:nvSpPr>
-        <p:spPr>
-          <a:xfrm xmlns:a="http://schemas.openxmlformats.org/drawingml/2006/main">
-            <a:off x="1000125" y="4476750"/>
-            <a:ext cx="476250" cy="476250"/>
-          </a:xfrm>
-          <a:prstGeom xmlns:a="http://schemas.openxmlformats.org/drawingml/2006/main" prst="ellipse">
+                <a16:creationId xmlns:a16="http://schemas.microsoft.com/office/drawing/2014/main" id="{22E90715-66C7-4BA7-AA01-08FABF34223A}"/>
+              </a:ext>
+            </a:extLst>
+          </p:cNvPr>
+          <p:cNvSpPr>
+            <a:spLocks xmlns:a="http://schemas.openxmlformats.org/drawingml/2006/main" noGrp="1"/>
+          </p:cNvSpPr>
+          <p:nvPr/>
+        </p:nvSpPr>
+        <p:spPr>
+          <a:xfrm xmlns:a="http://schemas.openxmlformats.org/drawingml/2006/main">
+            <a:off x="1714500" y="4181475"/>
+            <a:ext cx="9334500" cy="9525"/>
+          </a:xfrm>
+          <a:prstGeom xmlns:a="http://schemas.openxmlformats.org/drawingml/2006/main" prst="rect">
             <a:avLst/>
           </a:prstGeom>
           <a:solidFill xmlns:a="http://schemas.openxmlformats.org/drawingml/2006/main">
-            <a:srgbClr val="2C6E73"/>
+            <a:srgbClr val="D9E0E6"/>
           </a:solidFill>
           <a:ln xmlns:a="http://schemas.openxmlformats.org/drawingml/2006/main" w="0">
-            <a:noFill/>
+            <a:solidFill>
+              <a:srgbClr val="D9E0E6"/>
+            </a:solidFill>
           </a:ln>
         </p:spPr>
       </p:sp>
@@ -8729,19 +8737,19 @@
           <p:cNvPr id="21" name="">
             <a:extLst xmlns:a="http://schemas.openxmlformats.org/drawingml/2006/main">
               <a:ext uri="{FF2B5EF4-FFF2-40B4-BE49-F238E27FC236}">
-                <a16:creationId xmlns:a16="http://schemas.microsoft.com/office/drawing/2014/main" id="{62F2F2DB-19E1-434F-80B6-CAB3CC61F1A7}"/>
-              </a:ext>
-            </a:extLst>
-          </p:cNvPr>
-          <p:cNvSpPr>
-            <a:spLocks xmlns:a="http://schemas.openxmlformats.org/drawingml/2006/main" noGrp="1"/>
-          </p:cNvSpPr>
-          <p:nvPr/>
-        </p:nvSpPr>
-        <p:spPr>
-          <a:xfrm xmlns:a="http://schemas.openxmlformats.org/drawingml/2006/main">
-            <a:off x="1000125" y="4505325"/>
-            <a:ext cx="476250" cy="419100"/>
+                <a16:creationId xmlns:a16="http://schemas.microsoft.com/office/drawing/2014/main" id="{C96379E5-FF81-469D-9DA7-75E2CCE4F0C0}"/>
+              </a:ext>
+            </a:extLst>
+          </p:cNvPr>
+          <p:cNvSpPr>
+            <a:spLocks xmlns:a="http://schemas.openxmlformats.org/drawingml/2006/main" noGrp="1"/>
+          </p:cNvSpPr>
+          <p:nvPr/>
+        </p:nvSpPr>
+        <p:spPr>
+          <a:xfrm xmlns:a="http://schemas.openxmlformats.org/drawingml/2006/main">
+            <a:off x="1162050" y="4314825"/>
+            <a:ext cx="400050" cy="400050"/>
           </a:xfrm>
           <a:prstGeom xmlns:a="http://schemas.openxmlformats.org/drawingml/2006/main" prst="rect">
             <a:avLst/>
@@ -8758,9 +8766,9 @@
           <a:lstStyle xmlns:a="http://schemas.openxmlformats.org/drawingml/2006/main"/>
           <a:p xmlns:a="http://schemas.openxmlformats.org/drawingml/2006/main">
             <a:pPr algn="ctr">
-              <a:defRPr sz="1350" b="1">
-                <a:solidFill>
-                  <a:srgbClr val="FFFFFF"/>
+              <a:defRPr sz="1125" b="1">
+                <a:solidFill>
+                  <a:srgbClr val="2C6E73"/>
                 </a:solidFill>
                 <a:latin typeface="Arial"/>
                 <a:ea typeface="Arial"/>
@@ -8768,9 +8776,9 @@
               </a:defRPr>
             </a:pPr>
             <a:r>
-              <a:rPr sz="1350" b="1">
-                <a:solidFill>
-                  <a:srgbClr val="FFFFFF"/>
+              <a:rPr sz="1125" b="1">
+                <a:solidFill>
+                  <a:srgbClr val="2C6E73"/>
                 </a:solidFill>
                 <a:latin typeface="Arial"/>
                 <a:ea typeface="Arial"/>
@@ -8786,19 +8794,19 @@
           <p:cNvPr id="22" name="">
             <a:extLst xmlns:a="http://schemas.openxmlformats.org/drawingml/2006/main">
               <a:ext uri="{FF2B5EF4-FFF2-40B4-BE49-F238E27FC236}">
-                <a16:creationId xmlns:a16="http://schemas.microsoft.com/office/drawing/2014/main" id="{1A35723B-7871-4506-A781-952F891F208D}"/>
-              </a:ext>
-            </a:extLst>
-          </p:cNvPr>
-          <p:cNvSpPr>
-            <a:spLocks xmlns:a="http://schemas.openxmlformats.org/drawingml/2006/main" noGrp="1"/>
-          </p:cNvSpPr>
-          <p:nvPr/>
-        </p:nvSpPr>
-        <p:spPr>
-          <a:xfrm xmlns:a="http://schemas.openxmlformats.org/drawingml/2006/main">
-            <a:off x="1714500" y="4410075"/>
-            <a:ext cx="9429750" cy="609600"/>
+                <a16:creationId xmlns:a16="http://schemas.microsoft.com/office/drawing/2014/main" id="{DE733DF1-D2BB-4CB9-B466-324AE782852A}"/>
+              </a:ext>
+            </a:extLst>
+          </p:cNvPr>
+          <p:cNvSpPr>
+            <a:spLocks xmlns:a="http://schemas.openxmlformats.org/drawingml/2006/main" noGrp="1"/>
+          </p:cNvSpPr>
+          <p:nvPr/>
+        </p:nvSpPr>
+        <p:spPr>
+          <a:xfrm xmlns:a="http://schemas.openxmlformats.org/drawingml/2006/main">
+            <a:off x="1714500" y="4229100"/>
+            <a:ext cx="9525000" cy="638175"/>
           </a:xfrm>
           <a:prstGeom xmlns:a="http://schemas.openxmlformats.org/drawingml/2006/main" prst="rect">
             <a:avLst/>
@@ -8815,9 +8823,9 @@
           <a:lstStyle xmlns:a="http://schemas.openxmlformats.org/drawingml/2006/main"/>
           <a:p xmlns:a="http://schemas.openxmlformats.org/drawingml/2006/main">
             <a:pPr algn="l">
-              <a:defRPr sz="1500" b="1">
-                <a:solidFill>
-                  <a:srgbClr val="2F785D"/>
+              <a:defRPr sz="1575" b="0">
+                <a:solidFill>
+                  <a:srgbClr val="17253A"/>
                 </a:solidFill>
                 <a:latin typeface="Arial"/>
                 <a:ea typeface="Arial"/>
@@ -8825,15 +8833,161 @@
               </a:defRPr>
             </a:pPr>
             <a:r>
-              <a:rPr sz="1500" b="1">
+              <a:rPr sz="1575" b="0">
+                <a:solidFill>
+                  <a:srgbClr val="17253A"/>
+                </a:solidFill>
+                <a:latin typeface="Arial"/>
+                <a:ea typeface="Arial"/>
+                <a:cs typeface="Arial"/>
+              </a:rPr>
+              <a:t>1/1 × 3/5</a:t>
+            </a:r>
+          </a:p>
+        </p:txBody>
+      </p:sp>
+      <p:sp>
+        <p:nvSpPr>
+          <p:cNvPr id="23" name="">
+            <a:extLst xmlns:a="http://schemas.openxmlformats.org/drawingml/2006/main">
+              <a:ext uri="{FF2B5EF4-FFF2-40B4-BE49-F238E27FC236}">
+                <a16:creationId xmlns:a16="http://schemas.microsoft.com/office/drawing/2014/main" id="{45E78871-794E-40AC-9CA8-DA7100E729F2}"/>
+              </a:ext>
+            </a:extLst>
+          </p:cNvPr>
+          <p:cNvSpPr>
+            <a:spLocks xmlns:a="http://schemas.openxmlformats.org/drawingml/2006/main" noGrp="1"/>
+          </p:cNvSpPr>
+          <p:nvPr/>
+        </p:nvSpPr>
+        <p:spPr>
+          <a:xfrm xmlns:a="http://schemas.openxmlformats.org/drawingml/2006/main">
+            <a:off x="1714500" y="4886325"/>
+            <a:ext cx="9334500" cy="9525"/>
+          </a:xfrm>
+          <a:prstGeom xmlns:a="http://schemas.openxmlformats.org/drawingml/2006/main" prst="rect">
+            <a:avLst/>
+          </a:prstGeom>
+          <a:solidFill xmlns:a="http://schemas.openxmlformats.org/drawingml/2006/main">
+            <a:srgbClr val="D9E0E6"/>
+          </a:solidFill>
+          <a:ln xmlns:a="http://schemas.openxmlformats.org/drawingml/2006/main" w="0">
+            <a:solidFill>
+              <a:srgbClr val="D9E0E6"/>
+            </a:solidFill>
+          </a:ln>
+        </p:spPr>
+      </p:sp>
+      <p:sp>
+        <p:nvSpPr>
+          <p:cNvPr id="24" name="">
+            <a:extLst xmlns:a="http://schemas.openxmlformats.org/drawingml/2006/main">
+              <a:ext uri="{FF2B5EF4-FFF2-40B4-BE49-F238E27FC236}">
+                <a16:creationId xmlns:a16="http://schemas.microsoft.com/office/drawing/2014/main" id="{72632AA8-9880-4C81-B8DD-F689379BBA42}"/>
+              </a:ext>
+            </a:extLst>
+          </p:cNvPr>
+          <p:cNvSpPr>
+            <a:spLocks xmlns:a="http://schemas.openxmlformats.org/drawingml/2006/main" noGrp="1"/>
+          </p:cNvSpPr>
+          <p:nvPr/>
+        </p:nvSpPr>
+        <p:spPr>
+          <a:xfrm xmlns:a="http://schemas.openxmlformats.org/drawingml/2006/main">
+            <a:off x="1162050" y="5019675"/>
+            <a:ext cx="400050" cy="400050"/>
+          </a:xfrm>
+          <a:prstGeom xmlns:a="http://schemas.openxmlformats.org/drawingml/2006/main" prst="rect">
+            <a:avLst/>
+          </a:prstGeom>
+          <a:noFill xmlns:a="http://schemas.openxmlformats.org/drawingml/2006/main"/>
+          <a:ln xmlns:a="http://schemas.openxmlformats.org/drawingml/2006/main" w="0">
+            <a:noFill/>
+          </a:ln>
+        </p:spPr>
+        <p:txBody>
+          <a:bodyPr xmlns:a="http://schemas.openxmlformats.org/drawingml/2006/main" anchor="ctr">
+            <a:normAutofit fontScale="100000"/>
+          </a:bodyPr>
+          <a:lstStyle xmlns:a="http://schemas.openxmlformats.org/drawingml/2006/main"/>
+          <a:p xmlns:a="http://schemas.openxmlformats.org/drawingml/2006/main">
+            <a:pPr algn="ctr">
+              <a:defRPr sz="1125" b="1">
                 <a:solidFill>
                   <a:srgbClr val="2F785D"/>
                 </a:solidFill>
                 <a:latin typeface="Arial"/>
                 <a:ea typeface="Arial"/>
                 <a:cs typeface="Arial"/>
+              </a:defRPr>
+            </a:pPr>
+            <a:r>
+              <a:rPr sz="1125" b="1">
+                <a:solidFill>
+                  <a:srgbClr val="2F785D"/>
+                </a:solidFill>
+                <a:latin typeface="Arial"/>
+                <a:ea typeface="Arial"/>
+                <a:cs typeface="Arial"/>
               </a:rPr>
-              <a:t>Check the result: Simplify the product and check its size.</a:t>
+              <a:t>5</a:t>
+            </a:r>
+          </a:p>
+        </p:txBody>
+      </p:sp>
+      <p:sp>
+        <p:nvSpPr>
+          <p:cNvPr id="25" name="">
+            <a:extLst xmlns:a="http://schemas.openxmlformats.org/drawingml/2006/main">
+              <a:ext uri="{FF2B5EF4-FFF2-40B4-BE49-F238E27FC236}">
+                <a16:creationId xmlns:a16="http://schemas.microsoft.com/office/drawing/2014/main" id="{49146306-E2F8-4F08-8BDF-96F5E46269E3}"/>
+              </a:ext>
+            </a:extLst>
+          </p:cNvPr>
+          <p:cNvSpPr>
+            <a:spLocks xmlns:a="http://schemas.openxmlformats.org/drawingml/2006/main" noGrp="1"/>
+          </p:cNvSpPr>
+          <p:nvPr/>
+        </p:nvSpPr>
+        <p:spPr>
+          <a:xfrm xmlns:a="http://schemas.openxmlformats.org/drawingml/2006/main">
+            <a:off x="1714500" y="4933950"/>
+            <a:ext cx="9525000" cy="638175"/>
+          </a:xfrm>
+          <a:prstGeom xmlns:a="http://schemas.openxmlformats.org/drawingml/2006/main" prst="rect">
+            <a:avLst/>
+          </a:prstGeom>
+          <a:noFill xmlns:a="http://schemas.openxmlformats.org/drawingml/2006/main"/>
+          <a:ln xmlns:a="http://schemas.openxmlformats.org/drawingml/2006/main" w="0">
+            <a:noFill/>
+          </a:ln>
+        </p:spPr>
+        <p:txBody>
+          <a:bodyPr xmlns:a="http://schemas.openxmlformats.org/drawingml/2006/main" anchor="ctr">
+            <a:normAutofit fontScale="100000"/>
+          </a:bodyPr>
+          <a:lstStyle xmlns:a="http://schemas.openxmlformats.org/drawingml/2006/main"/>
+          <a:p xmlns:a="http://schemas.openxmlformats.org/drawingml/2006/main">
+            <a:pPr algn="l">
+              <a:defRPr sz="1575" b="1">
+                <a:solidFill>
+                  <a:srgbClr val="2F785D"/>
+                </a:solidFill>
+                <a:latin typeface="Arial"/>
+                <a:ea typeface="Arial"/>
+                <a:cs typeface="Arial"/>
+              </a:defRPr>
+            </a:pPr>
+            <a:r>
+              <a:rPr sz="1575" b="1">
+                <a:solidFill>
+                  <a:srgbClr val="2F785D"/>
+                </a:solidFill>
+                <a:latin typeface="Arial"/>
+                <a:ea typeface="Arial"/>
+                <a:cs typeface="Arial"/>
+              </a:rPr>
+              <a:t>3/5</a:t>
             </a:r>
           </a:p>
         </p:txBody>
@@ -8841,7 +8995,7 @@
     </p:spTree>
     <p:extLst>
       <p:ext uri="{BB962C8B-B14F-4D97-AF65-F5344CB8AC3E}">
-        <p14:creationId xmlns:p14="http://schemas.microsoft.com/office/powerpoint/2010/main" val="665595536"/>
+        <p14:creationId xmlns:p14="http://schemas.microsoft.com/office/powerpoint/2010/main" val="1242371564"/>
       </p:ext>
     </p:extLst>
   </p:cSld>
@@ -9078,6 +9232,51 @@
                       </p:childTnLst>
                     </p:cTn>
                   </p:par>
+                  <p:par>
+                    <p:cTn id="23" fill="hold">
+                      <p:stCondLst>
+                        <p:cond delay="indefinite"/>
+                      </p:stCondLst>
+                      <p:childTnLst>
+                        <p:par>
+                          <p:cTn id="24" fill="hold">
+                            <p:stCondLst>
+                              <p:cond delay="0"/>
+                            </p:stCondLst>
+                            <p:childTnLst>
+                              <p:par>
+                                <p:cTn id="25" presetID="1" presetClass="entr" presetSubtype="0" fill="hold" grpId="0" nodeType="clickEffect">
+                                  <p:stCondLst>
+                                    <p:cond delay="0"/>
+                                  </p:stCondLst>
+                                  <p:childTnLst>
+                                    <p:set>
+                                      <p:cBhvr>
+                                        <p:cTn id="26" dur="1" fill="hold">
+                                          <p:stCondLst>
+                                            <p:cond delay="0"/>
+                                          </p:stCondLst>
+                                        </p:cTn>
+                                        <p:tgtEl>
+                                          <p:spTgt spid="25"/>
+                                        </p:tgtEl>
+                                        <p:attrNameLst>
+                                          <p:attrName>style.visibility</p:attrName>
+                                        </p:attrNameLst>
+                                      </p:cBhvr>
+                                      <p:to>
+                                        <p:strVal val="visible"/>
+                                      </p:to>
+                                    </p:set>
+                                  </p:childTnLst>
+                                </p:cTn>
+                              </p:par>
+                            </p:childTnLst>
+                          </p:cTn>
+                        </p:par>
+                      </p:childTnLst>
+                    </p:cTn>
+                  </p:par>
                 </p:childTnLst>
               </p:cTn>
               <p:prevCondLst>
@@ -9105,6 +9304,7 @@
       <p:bldP spid="16" grpId="0"/>
       <p:bldP spid="19" grpId="0"/>
       <p:bldP spid="22" grpId="0"/>
+      <p:bldP spid="25" grpId="0"/>
     </p:bldLst>
   </p:timing>
 </p:sld>
@@ -9134,7 +9334,7 @@
           <p:cNvPr id="15" name="">
             <a:extLst xmlns:a="http://schemas.openxmlformats.org/drawingml/2006/main">
               <a:ext uri="{FF2B5EF4-FFF2-40B4-BE49-F238E27FC236}">
-                <a16:creationId xmlns:a16="http://schemas.microsoft.com/office/drawing/2014/main" id="{20CFD1C1-8F30-4A44-B340-C32B5971ED1E}"/>
+                <a16:creationId xmlns:a16="http://schemas.microsoft.com/office/drawing/2014/main" id="{14A15502-0215-4C1C-B93E-9897DD2E6E49}"/>
               </a:ext>
             </a:extLst>
           </p:cNvPr>
@@ -9166,7 +9366,7 @@
           <p:cNvPr id="2" name="">
             <a:extLst xmlns:a="http://schemas.openxmlformats.org/drawingml/2006/main">
               <a:ext uri="{FF2B5EF4-FFF2-40B4-BE49-F238E27FC236}">
-                <a16:creationId xmlns:a16="http://schemas.microsoft.com/office/drawing/2014/main" id="{D2DFD2B3-0C93-4A86-B725-10FA2816C2C9}"/>
+                <a16:creationId xmlns:a16="http://schemas.microsoft.com/office/drawing/2014/main" id="{430CFE51-BB3C-4AAA-AD72-4D3914A3E22F}"/>
               </a:ext>
             </a:extLst>
           </p:cNvPr>
@@ -9223,7 +9423,7 @@
           <p:cNvPr id="3" name="">
             <a:extLst xmlns:a="http://schemas.openxmlformats.org/drawingml/2006/main">
               <a:ext uri="{FF2B5EF4-FFF2-40B4-BE49-F238E27FC236}">
-                <a16:creationId xmlns:a16="http://schemas.microsoft.com/office/drawing/2014/main" id="{8DB3D930-082C-43E1-9F72-CE6CEBC6680C}"/>
+                <a16:creationId xmlns:a16="http://schemas.microsoft.com/office/drawing/2014/main" id="{963FBDC0-B098-4E8F-849E-5D361798C8A8}"/>
               </a:ext>
             </a:extLst>
           </p:cNvPr>
@@ -9255,7 +9455,7 @@
           <p:cNvPr id="4" name="">
             <a:extLst xmlns:a="http://schemas.openxmlformats.org/drawingml/2006/main">
               <a:ext uri="{FF2B5EF4-FFF2-40B4-BE49-F238E27FC236}">
-                <a16:creationId xmlns:a16="http://schemas.microsoft.com/office/drawing/2014/main" id="{AC72087F-7967-48BE-B016-54EDB5065B28}"/>
+                <a16:creationId xmlns:a16="http://schemas.microsoft.com/office/drawing/2014/main" id="{77FE0905-8DF8-4933-88F3-DB36C073D020}"/>
               </a:ext>
             </a:extLst>
           </p:cNvPr>
@@ -9312,7 +9512,7 @@
           <p:cNvPr id="5" name="">
             <a:extLst xmlns:a="http://schemas.openxmlformats.org/drawingml/2006/main">
               <a:ext uri="{FF2B5EF4-FFF2-40B4-BE49-F238E27FC236}">
-                <a16:creationId xmlns:a16="http://schemas.microsoft.com/office/drawing/2014/main" id="{BC6AEACB-15CC-447D-A373-27046D065293}"/>
+                <a16:creationId xmlns:a16="http://schemas.microsoft.com/office/drawing/2014/main" id="{F433D12E-0940-4385-83F4-2B2B27933339}"/>
               </a:ext>
             </a:extLst>
           </p:cNvPr>
@@ -9369,7 +9569,7 @@
           <p:cNvPr id="6" name="">
             <a:extLst xmlns:a="http://schemas.openxmlformats.org/drawingml/2006/main">
               <a:ext uri="{FF2B5EF4-FFF2-40B4-BE49-F238E27FC236}">
-                <a16:creationId xmlns:a16="http://schemas.microsoft.com/office/drawing/2014/main" id="{31178AF0-1A17-4517-BCF8-CA3AAB2AFECA}"/>
+                <a16:creationId xmlns:a16="http://schemas.microsoft.com/office/drawing/2014/main" id="{3531F1D3-0B94-4F22-A068-9DCAE2387DE3}"/>
               </a:ext>
             </a:extLst>
           </p:cNvPr>
@@ -9426,7 +9626,7 @@
           <p:cNvPr id="7" name="">
             <a:extLst xmlns:a="http://schemas.openxmlformats.org/drawingml/2006/main">
               <a:ext uri="{FF2B5EF4-FFF2-40B4-BE49-F238E27FC236}">
-                <a16:creationId xmlns:a16="http://schemas.microsoft.com/office/drawing/2014/main" id="{3F1171D2-9CCB-4093-9235-E386A953F5E0}"/>
+                <a16:creationId xmlns:a16="http://schemas.microsoft.com/office/drawing/2014/main" id="{8DB67F58-9261-4303-B04B-F454CF91CB9F}"/>
               </a:ext>
             </a:extLst>
           </p:cNvPr>
@@ -9458,7 +9658,7 @@
           <p:cNvPr id="8" name="">
             <a:extLst xmlns:a="http://schemas.openxmlformats.org/drawingml/2006/main">
               <a:ext uri="{FF2B5EF4-FFF2-40B4-BE49-F238E27FC236}">
-                <a16:creationId xmlns:a16="http://schemas.microsoft.com/office/drawing/2014/main" id="{95CF8C1F-D485-4DC8-9A8E-1992FAD2FAD9}"/>
+                <a16:creationId xmlns:a16="http://schemas.microsoft.com/office/drawing/2014/main" id="{A79A2815-25DC-483A-8488-7252B7015A87}"/>
               </a:ext>
             </a:extLst>
           </p:cNvPr>
@@ -9515,7 +9715,7 @@
           <p:cNvPr id="9" name="">
             <a:extLst xmlns:a="http://schemas.openxmlformats.org/drawingml/2006/main">
               <a:ext uri="{FF2B5EF4-FFF2-40B4-BE49-F238E27FC236}">
-                <a16:creationId xmlns:a16="http://schemas.microsoft.com/office/drawing/2014/main" id="{25B14B79-482B-4BB3-8D9B-263F396D8338}"/>
+                <a16:creationId xmlns:a16="http://schemas.microsoft.com/office/drawing/2014/main" id="{C92BF14C-5DE7-43F9-BFEF-D2D36BA8EC04}"/>
               </a:ext>
             </a:extLst>
           </p:cNvPr>
@@ -9572,7 +9772,7 @@
           <p:cNvPr id="10" name="">
             <a:extLst xmlns:a="http://schemas.openxmlformats.org/drawingml/2006/main">
               <a:ext uri="{FF2B5EF4-FFF2-40B4-BE49-F238E27FC236}">
-                <a16:creationId xmlns:a16="http://schemas.microsoft.com/office/drawing/2014/main" id="{B1A3A8BB-0139-491D-B827-DDF516247C1F}"/>
+                <a16:creationId xmlns:a16="http://schemas.microsoft.com/office/drawing/2014/main" id="{5E3C4688-A118-45F2-B972-B106D807EB0B}"/>
               </a:ext>
             </a:extLst>
           </p:cNvPr>
@@ -9629,7 +9829,7 @@
           <p:cNvPr id="11" name="">
             <a:extLst xmlns:a="http://schemas.openxmlformats.org/drawingml/2006/main">
               <a:ext uri="{FF2B5EF4-FFF2-40B4-BE49-F238E27FC236}">
-                <a16:creationId xmlns:a16="http://schemas.microsoft.com/office/drawing/2014/main" id="{B42F25A1-91C9-40E3-B719-C243D3F159E8}"/>
+                <a16:creationId xmlns:a16="http://schemas.microsoft.com/office/drawing/2014/main" id="{5F9EE741-A546-4B24-A624-79F32EA4C6D5}"/>
               </a:ext>
             </a:extLst>
           </p:cNvPr>
@@ -9686,7 +9886,7 @@
           <p:cNvPr id="12" name="">
             <a:extLst xmlns:a="http://schemas.openxmlformats.org/drawingml/2006/main">
               <a:ext uri="{FF2B5EF4-FFF2-40B4-BE49-F238E27FC236}">
-                <a16:creationId xmlns:a16="http://schemas.microsoft.com/office/drawing/2014/main" id="{24372B1A-5D12-43A2-B8A6-36A0B51AFF1D}"/>
+                <a16:creationId xmlns:a16="http://schemas.microsoft.com/office/drawing/2014/main" id="{F2841360-0C47-483C-9FD0-DC681B0A2C0B}"/>
               </a:ext>
             </a:extLst>
           </p:cNvPr>
@@ -9718,7 +9918,7 @@
           <p:cNvPr id="13" name="">
             <a:extLst xmlns:a="http://schemas.openxmlformats.org/drawingml/2006/main">
               <a:ext uri="{FF2B5EF4-FFF2-40B4-BE49-F238E27FC236}">
-                <a16:creationId xmlns:a16="http://schemas.microsoft.com/office/drawing/2014/main" id="{180AC893-3DCD-4BE3-A811-50C18123791C}"/>
+                <a16:creationId xmlns:a16="http://schemas.microsoft.com/office/drawing/2014/main" id="{FAF40F27-CCF7-4F12-8FEC-24C72207A5E1}"/>
               </a:ext>
             </a:extLst>
           </p:cNvPr>
@@ -9775,7 +9975,7 @@
           <p:cNvPr id="14" name="">
             <a:extLst xmlns:a="http://schemas.openxmlformats.org/drawingml/2006/main">
               <a:ext uri="{FF2B5EF4-FFF2-40B4-BE49-F238E27FC236}">
-                <a16:creationId xmlns:a16="http://schemas.microsoft.com/office/drawing/2014/main" id="{85B6BB4A-529F-4BE3-91D4-7B54C7AF390E}"/>
+                <a16:creationId xmlns:a16="http://schemas.microsoft.com/office/drawing/2014/main" id="{7A63A314-E11F-48B2-9CFF-EC66254E616B}"/>
               </a:ext>
             </a:extLst>
           </p:cNvPr>
@@ -9830,7 +10030,7 @@
     </p:spTree>
     <p:extLst>
       <p:ext uri="{BB962C8B-B14F-4D97-AF65-F5344CB8AC3E}">
-        <p14:creationId xmlns:p14="http://schemas.microsoft.com/office/powerpoint/2010/main" val="1044629940"/>
+        <p14:creationId xmlns:p14="http://schemas.microsoft.com/office/powerpoint/2010/main" val="1686748212"/>
       </p:ext>
     </p:extLst>
   </p:cSld>
@@ -10031,7 +10231,7 @@
           <p:cNvPr id="16" name="">
             <a:extLst xmlns:a="http://schemas.openxmlformats.org/drawingml/2006/main">
               <a:ext uri="{FF2B5EF4-FFF2-40B4-BE49-F238E27FC236}">
-                <a16:creationId xmlns:a16="http://schemas.microsoft.com/office/drawing/2014/main" id="{4AF910B2-06E8-497F-A3DC-AA7E77FF5946}"/>
+                <a16:creationId xmlns:a16="http://schemas.microsoft.com/office/drawing/2014/main" id="{0A499D3B-ED8F-4AF1-AA5A-D594B4B52393}"/>
               </a:ext>
             </a:extLst>
           </p:cNvPr>
@@ -10063,7 +10263,7 @@
           <p:cNvPr id="2" name="">
             <a:extLst xmlns:a="http://schemas.openxmlformats.org/drawingml/2006/main">
               <a:ext uri="{FF2B5EF4-FFF2-40B4-BE49-F238E27FC236}">
-                <a16:creationId xmlns:a16="http://schemas.microsoft.com/office/drawing/2014/main" id="{4E37EEA9-31F3-4BB9-BB20-4A8758259445}"/>
+                <a16:creationId xmlns:a16="http://schemas.microsoft.com/office/drawing/2014/main" id="{E4C7F27B-E04E-41FD-9C64-5404DD8EBF10}"/>
               </a:ext>
             </a:extLst>
           </p:cNvPr>
@@ -10120,7 +10320,7 @@
           <p:cNvPr id="3" name="">
             <a:extLst xmlns:a="http://schemas.openxmlformats.org/drawingml/2006/main">
               <a:ext uri="{FF2B5EF4-FFF2-40B4-BE49-F238E27FC236}">
-                <a16:creationId xmlns:a16="http://schemas.microsoft.com/office/drawing/2014/main" id="{1A1F0A5A-222B-4DA4-8D1B-50FC752659F1}"/>
+                <a16:creationId xmlns:a16="http://schemas.microsoft.com/office/drawing/2014/main" id="{FECC687A-8DC4-4608-93E2-EB52FE376206}"/>
               </a:ext>
             </a:extLst>
           </p:cNvPr>
@@ -10152,7 +10352,7 @@
           <p:cNvPr id="4" name="">
             <a:extLst xmlns:a="http://schemas.openxmlformats.org/drawingml/2006/main">
               <a:ext uri="{FF2B5EF4-FFF2-40B4-BE49-F238E27FC236}">
-                <a16:creationId xmlns:a16="http://schemas.microsoft.com/office/drawing/2014/main" id="{C5C7C02C-621D-441D-9A89-6510CB194009}"/>
+                <a16:creationId xmlns:a16="http://schemas.microsoft.com/office/drawing/2014/main" id="{4F4B8321-B6FE-468F-BEC1-7E6E7637532A}"/>
               </a:ext>
             </a:extLst>
           </p:cNvPr>
@@ -10209,7 +10409,7 @@
           <p:cNvPr id="5" name="">
             <a:extLst xmlns:a="http://schemas.openxmlformats.org/drawingml/2006/main">
               <a:ext uri="{FF2B5EF4-FFF2-40B4-BE49-F238E27FC236}">
-                <a16:creationId xmlns:a16="http://schemas.microsoft.com/office/drawing/2014/main" id="{8DB609B7-8751-4B46-95F0-6547B74164A9}"/>
+                <a16:creationId xmlns:a16="http://schemas.microsoft.com/office/drawing/2014/main" id="{EF34A652-A0E6-4440-8B26-D8DC200CA138}"/>
               </a:ext>
             </a:extLst>
           </p:cNvPr>
@@ -10266,7 +10466,7 @@
           <p:cNvPr id="6" name="">
             <a:extLst xmlns:a="http://schemas.openxmlformats.org/drawingml/2006/main">
               <a:ext uri="{FF2B5EF4-FFF2-40B4-BE49-F238E27FC236}">
-                <a16:creationId xmlns:a16="http://schemas.microsoft.com/office/drawing/2014/main" id="{DA9A83B2-4CF8-4423-8BB3-07C6DC643568}"/>
+                <a16:creationId xmlns:a16="http://schemas.microsoft.com/office/drawing/2014/main" id="{AAB9786F-ABA0-4A9F-855D-DC5FFDC38755}"/>
               </a:ext>
             </a:extLst>
           </p:cNvPr>
@@ -10323,7 +10523,7 @@
           <p:cNvPr id="7" name="">
             <a:extLst xmlns:a="http://schemas.openxmlformats.org/drawingml/2006/main">
               <a:ext uri="{FF2B5EF4-FFF2-40B4-BE49-F238E27FC236}">
-                <a16:creationId xmlns:a16="http://schemas.microsoft.com/office/drawing/2014/main" id="{9AA41DA9-0EB4-4237-9A69-5AD395F68DE0}"/>
+                <a16:creationId xmlns:a16="http://schemas.microsoft.com/office/drawing/2014/main" id="{86700EAD-14F8-4C43-AAA4-DC94C98C4DC3}"/>
               </a:ext>
             </a:extLst>
           </p:cNvPr>
@@ -10355,7 +10555,7 @@
           <p:cNvPr id="8" name="">
             <a:extLst xmlns:a="http://schemas.openxmlformats.org/drawingml/2006/main">
               <a:ext uri="{FF2B5EF4-FFF2-40B4-BE49-F238E27FC236}">
-                <a16:creationId xmlns:a16="http://schemas.microsoft.com/office/drawing/2014/main" id="{61A7B3D5-5922-4CFA-BEB4-4F2592C1FF86}"/>
+                <a16:creationId xmlns:a16="http://schemas.microsoft.com/office/drawing/2014/main" id="{91C61C44-B516-461E-B68B-47458D027434}"/>
               </a:ext>
             </a:extLst>
           </p:cNvPr>
@@ -10412,7 +10612,7 @@
           <p:cNvPr id="9" name="">
             <a:extLst xmlns:a="http://schemas.openxmlformats.org/drawingml/2006/main">
               <a:ext uri="{FF2B5EF4-FFF2-40B4-BE49-F238E27FC236}">
-                <a16:creationId xmlns:a16="http://schemas.microsoft.com/office/drawing/2014/main" id="{589684CE-027A-4193-80DF-3F352A5EB108}"/>
+                <a16:creationId xmlns:a16="http://schemas.microsoft.com/office/drawing/2014/main" id="{D05CEAF5-0396-48F9-B0A7-4895F8064A5B}"/>
               </a:ext>
             </a:extLst>
           </p:cNvPr>
@@ -10469,7 +10669,7 @@
           <p:cNvPr id="10" name="">
             <a:extLst xmlns:a="http://schemas.openxmlformats.org/drawingml/2006/main">
               <a:ext uri="{FF2B5EF4-FFF2-40B4-BE49-F238E27FC236}">
-                <a16:creationId xmlns:a16="http://schemas.microsoft.com/office/drawing/2014/main" id="{BD837FB4-32A7-456D-BCF6-39A8B8B162EE}"/>
+                <a16:creationId xmlns:a16="http://schemas.microsoft.com/office/drawing/2014/main" id="{F7EF72C4-EF78-49DD-A239-64FABFA9048A}"/>
               </a:ext>
             </a:extLst>
           </p:cNvPr>
@@ -10526,7 +10726,7 @@
           <p:cNvPr id="11" name="">
             <a:extLst xmlns:a="http://schemas.openxmlformats.org/drawingml/2006/main">
               <a:ext uri="{FF2B5EF4-FFF2-40B4-BE49-F238E27FC236}">
-                <a16:creationId xmlns:a16="http://schemas.microsoft.com/office/drawing/2014/main" id="{6E256E42-1AA9-4FCF-B146-FD0CB722D15B}"/>
+                <a16:creationId xmlns:a16="http://schemas.microsoft.com/office/drawing/2014/main" id="{6AF8CF97-E4E1-4859-8C0F-B08CF36B7CD0}"/>
               </a:ext>
             </a:extLst>
           </p:cNvPr>
@@ -10583,7 +10783,7 @@
           <p:cNvPr id="12" name="">
             <a:extLst xmlns:a="http://schemas.openxmlformats.org/drawingml/2006/main">
               <a:ext uri="{FF2B5EF4-FFF2-40B4-BE49-F238E27FC236}">
-                <a16:creationId xmlns:a16="http://schemas.microsoft.com/office/drawing/2014/main" id="{B3E54E16-7D74-4DCE-8F81-188824A47F12}"/>
+                <a16:creationId xmlns:a16="http://schemas.microsoft.com/office/drawing/2014/main" id="{E57EFCBD-6ECA-4C1B-B756-3CE4ECADFCBF}"/>
               </a:ext>
             </a:extLst>
           </p:cNvPr>
@@ -10640,7 +10840,7 @@
           <p:cNvPr id="13" name="">
             <a:extLst xmlns:a="http://schemas.openxmlformats.org/drawingml/2006/main">
               <a:ext uri="{FF2B5EF4-FFF2-40B4-BE49-F238E27FC236}">
-                <a16:creationId xmlns:a16="http://schemas.microsoft.com/office/drawing/2014/main" id="{9CC0C5C1-C324-4548-A725-4FBA1F078842}"/>
+                <a16:creationId xmlns:a16="http://schemas.microsoft.com/office/drawing/2014/main" id="{CC6FB299-5141-475C-B767-FDD899617DA2}"/>
               </a:ext>
             </a:extLst>
           </p:cNvPr>
@@ -10697,7 +10897,7 @@
           <p:cNvPr id="14" name="">
             <a:extLst xmlns:a="http://schemas.openxmlformats.org/drawingml/2006/main">
               <a:ext uri="{FF2B5EF4-FFF2-40B4-BE49-F238E27FC236}">
-                <a16:creationId xmlns:a16="http://schemas.microsoft.com/office/drawing/2014/main" id="{A405DC71-F39A-497F-A2EB-73E91A544717}"/>
+                <a16:creationId xmlns:a16="http://schemas.microsoft.com/office/drawing/2014/main" id="{93D4F64A-4660-4E53-A487-33A8EC6D1BBC}"/>
               </a:ext>
             </a:extLst>
           </p:cNvPr>
@@ -10754,7 +10954,7 @@
           <p:cNvPr id="15" name="">
             <a:extLst xmlns:a="http://schemas.openxmlformats.org/drawingml/2006/main">
               <a:ext uri="{FF2B5EF4-FFF2-40B4-BE49-F238E27FC236}">
-                <a16:creationId xmlns:a16="http://schemas.microsoft.com/office/drawing/2014/main" id="{7219CA58-98BD-4E05-98CD-C44B4DFDBCCD}"/>
+                <a16:creationId xmlns:a16="http://schemas.microsoft.com/office/drawing/2014/main" id="{2434928B-EF7A-4A0F-8563-5A94E8AD5D75}"/>
               </a:ext>
             </a:extLst>
           </p:cNvPr>
@@ -10809,7 +11009,7 @@
     </p:spTree>
     <p:extLst>
       <p:ext uri="{BB962C8B-B14F-4D97-AF65-F5344CB8AC3E}">
-        <p14:creationId xmlns:p14="http://schemas.microsoft.com/office/powerpoint/2010/main" val="867117396"/>
+        <p14:creationId xmlns:p14="http://schemas.microsoft.com/office/powerpoint/2010/main" val="330891898"/>
       </p:ext>
     </p:extLst>
   </p:cSld>
@@ -10964,7 +11164,7 @@
           <p:cNvPr id="16" name="">
             <a:extLst xmlns:a="http://schemas.openxmlformats.org/drawingml/2006/main">
               <a:ext uri="{FF2B5EF4-FFF2-40B4-BE49-F238E27FC236}">
-                <a16:creationId xmlns:a16="http://schemas.microsoft.com/office/drawing/2014/main" id="{9B696DC3-5986-45BC-99C5-485BDE663582}"/>
+                <a16:creationId xmlns:a16="http://schemas.microsoft.com/office/drawing/2014/main" id="{D08D7170-98D7-44A8-AEA2-E20EE98A4AA5}"/>
               </a:ext>
             </a:extLst>
           </p:cNvPr>
@@ -10996,7 +11196,7 @@
           <p:cNvPr id="2" name="">
             <a:extLst xmlns:a="http://schemas.openxmlformats.org/drawingml/2006/main">
               <a:ext uri="{FF2B5EF4-FFF2-40B4-BE49-F238E27FC236}">
-                <a16:creationId xmlns:a16="http://schemas.microsoft.com/office/drawing/2014/main" id="{A1C07B24-905E-4C8E-980C-8B06F154F25A}"/>
+                <a16:creationId xmlns:a16="http://schemas.microsoft.com/office/drawing/2014/main" id="{F31F98C8-3AF6-44CE-886D-CE4BA6A6FE8F}"/>
               </a:ext>
             </a:extLst>
           </p:cNvPr>
@@ -11053,7 +11253,7 @@
           <p:cNvPr id="3" name="">
             <a:extLst xmlns:a="http://schemas.openxmlformats.org/drawingml/2006/main">
               <a:ext uri="{FF2B5EF4-FFF2-40B4-BE49-F238E27FC236}">
-                <a16:creationId xmlns:a16="http://schemas.microsoft.com/office/drawing/2014/main" id="{7337F332-0BD2-4C19-9AFC-2DDC40A58FF9}"/>
+                <a16:creationId xmlns:a16="http://schemas.microsoft.com/office/drawing/2014/main" id="{F9DFAB77-65C2-4492-A1F3-F5AD08FA62A0}"/>
               </a:ext>
             </a:extLst>
           </p:cNvPr>
@@ -11085,7 +11285,7 @@
           <p:cNvPr id="4" name="">
             <a:extLst xmlns:a="http://schemas.openxmlformats.org/drawingml/2006/main">
               <a:ext uri="{FF2B5EF4-FFF2-40B4-BE49-F238E27FC236}">
-                <a16:creationId xmlns:a16="http://schemas.microsoft.com/office/drawing/2014/main" id="{43FD9907-ED7D-4B25-A76B-20B4C8B3E992}"/>
+                <a16:creationId xmlns:a16="http://schemas.microsoft.com/office/drawing/2014/main" id="{7F123350-A959-4A87-B397-2EC038C9562A}"/>
               </a:ext>
             </a:extLst>
           </p:cNvPr>
@@ -11142,7 +11342,7 @@
           <p:cNvPr id="5" name="">
             <a:extLst xmlns:a="http://schemas.openxmlformats.org/drawingml/2006/main">
               <a:ext uri="{FF2B5EF4-FFF2-40B4-BE49-F238E27FC236}">
-                <a16:creationId xmlns:a16="http://schemas.microsoft.com/office/drawing/2014/main" id="{8617C3C3-60F2-4274-BE24-1B0F39180FCB}"/>
+                <a16:creationId xmlns:a16="http://schemas.microsoft.com/office/drawing/2014/main" id="{9F0BB832-9E62-46B7-B03A-92F70D517E85}"/>
               </a:ext>
             </a:extLst>
           </p:cNvPr>
@@ -11199,7 +11399,7 @@
           <p:cNvPr id="6" name="">
             <a:extLst xmlns:a="http://schemas.openxmlformats.org/drawingml/2006/main">
               <a:ext uri="{FF2B5EF4-FFF2-40B4-BE49-F238E27FC236}">
-                <a16:creationId xmlns:a16="http://schemas.microsoft.com/office/drawing/2014/main" id="{1C9C4322-D360-4659-9E8B-FFF2AEC36AFC}"/>
+                <a16:creationId xmlns:a16="http://schemas.microsoft.com/office/drawing/2014/main" id="{941ACA53-58D7-493B-BD15-64C55EA49326}"/>
               </a:ext>
             </a:extLst>
           </p:cNvPr>
@@ -11256,7 +11456,7 @@
           <p:cNvPr id="7" name="">
             <a:extLst xmlns:a="http://schemas.openxmlformats.org/drawingml/2006/main">
               <a:ext uri="{FF2B5EF4-FFF2-40B4-BE49-F238E27FC236}">
-                <a16:creationId xmlns:a16="http://schemas.microsoft.com/office/drawing/2014/main" id="{1234130B-7B57-4C9B-872E-874BD3A5CF5E}"/>
+                <a16:creationId xmlns:a16="http://schemas.microsoft.com/office/drawing/2014/main" id="{E0998AEB-B0D1-43CC-AC28-7AD3F7685F98}"/>
               </a:ext>
             </a:extLst>
           </p:cNvPr>
@@ -11288,7 +11488,7 @@
           <p:cNvPr id="8" name="">
             <a:extLst xmlns:a="http://schemas.openxmlformats.org/drawingml/2006/main">
               <a:ext uri="{FF2B5EF4-FFF2-40B4-BE49-F238E27FC236}">
-                <a16:creationId xmlns:a16="http://schemas.microsoft.com/office/drawing/2014/main" id="{592B7E9F-397B-49EF-9269-6FC096D23BC0}"/>
+                <a16:creationId xmlns:a16="http://schemas.microsoft.com/office/drawing/2014/main" id="{F611E6AD-5C0E-4872-B9A1-F970CFE02F99}"/>
               </a:ext>
             </a:extLst>
           </p:cNvPr>
@@ -11345,7 +11545,7 @@
           <p:cNvPr id="9" name="">
             <a:extLst xmlns:a="http://schemas.openxmlformats.org/drawingml/2006/main">
               <a:ext uri="{FF2B5EF4-FFF2-40B4-BE49-F238E27FC236}">
-                <a16:creationId xmlns:a16="http://schemas.microsoft.com/office/drawing/2014/main" id="{6C2096AF-200C-4642-9391-97DA02366C27}"/>
+                <a16:creationId xmlns:a16="http://schemas.microsoft.com/office/drawing/2014/main" id="{741D756C-1124-4E14-8ACF-90C5716DE238}"/>
               </a:ext>
             </a:extLst>
           </p:cNvPr>
@@ -11406,7 +11606,7 @@
           <p:nvPr/>
         </p:nvPicPr>
         <p:blipFill>
-          <a:blip xmlns:r="http://schemas.openxmlformats.org/officeDocument/2006/relationships" xmlns:a="http://schemas.openxmlformats.org/drawingml/2006/main" r:embed="Rcb01245c60904714"/>
+          <a:blip xmlns:r="http://schemas.openxmlformats.org/officeDocument/2006/relationships" xmlns:a="http://schemas.openxmlformats.org/drawingml/2006/main" r:embed="Rd592115c16824abe"/>
           <a:stretch xmlns:a="http://schemas.openxmlformats.org/drawingml/2006/main"/>
         </p:blipFill>
         <p:spPr>
@@ -11424,7 +11624,7 @@
           <p:cNvPr id="11" name="">
             <a:extLst xmlns:a="http://schemas.openxmlformats.org/drawingml/2006/main">
               <a:ext uri="{FF2B5EF4-FFF2-40B4-BE49-F238E27FC236}">
-                <a16:creationId xmlns:a16="http://schemas.microsoft.com/office/drawing/2014/main" id="{5A867E1E-8F36-43F4-B187-EF3306711781}"/>
+                <a16:creationId xmlns:a16="http://schemas.microsoft.com/office/drawing/2014/main" id="{B8837D21-C2C9-419E-BDF7-756E3F9BB80F}"/>
               </a:ext>
             </a:extLst>
           </p:cNvPr>
@@ -11481,7 +11681,7 @@
           <p:cNvPr id="12" name="">
             <a:extLst xmlns:a="http://schemas.openxmlformats.org/drawingml/2006/main">
               <a:ext uri="{FF2B5EF4-FFF2-40B4-BE49-F238E27FC236}">
-                <a16:creationId xmlns:a16="http://schemas.microsoft.com/office/drawing/2014/main" id="{B6FC0AB4-3F24-42AA-8856-9BC1828D5031}"/>
+                <a16:creationId xmlns:a16="http://schemas.microsoft.com/office/drawing/2014/main" id="{AA00F4F6-E760-4F24-8E2B-FBFB88087883}"/>
               </a:ext>
             </a:extLst>
           </p:cNvPr>
@@ -11538,7 +11738,7 @@
           <p:cNvPr id="13" name="">
             <a:extLst xmlns:a="http://schemas.openxmlformats.org/drawingml/2006/main">
               <a:ext uri="{FF2B5EF4-FFF2-40B4-BE49-F238E27FC236}">
-                <a16:creationId xmlns:a16="http://schemas.microsoft.com/office/drawing/2014/main" id="{DAF142A8-7CC4-44A0-BFCB-AC5E61A48223}"/>
+                <a16:creationId xmlns:a16="http://schemas.microsoft.com/office/drawing/2014/main" id="{1C02E1F2-2D8B-44D6-B502-AA65929970B5}"/>
               </a:ext>
             </a:extLst>
           </p:cNvPr>
@@ -11570,7 +11770,7 @@
           <p:cNvPr id="14" name="">
             <a:extLst xmlns:a="http://schemas.openxmlformats.org/drawingml/2006/main">
               <a:ext uri="{FF2B5EF4-FFF2-40B4-BE49-F238E27FC236}">
-                <a16:creationId xmlns:a16="http://schemas.microsoft.com/office/drawing/2014/main" id="{974F30FC-C892-4D57-B980-2E2301DFA12B}"/>
+                <a16:creationId xmlns:a16="http://schemas.microsoft.com/office/drawing/2014/main" id="{7DFD6EE7-DEA2-4529-95CE-01A64948ADDD}"/>
               </a:ext>
             </a:extLst>
           </p:cNvPr>
@@ -11627,7 +11827,7 @@
           <p:cNvPr id="15" name="">
             <a:extLst xmlns:a="http://schemas.openxmlformats.org/drawingml/2006/main">
               <a:ext uri="{FF2B5EF4-FFF2-40B4-BE49-F238E27FC236}">
-                <a16:creationId xmlns:a16="http://schemas.microsoft.com/office/drawing/2014/main" id="{DE0B12B3-F92C-4629-887A-3CDE73ABCA94}"/>
+                <a16:creationId xmlns:a16="http://schemas.microsoft.com/office/drawing/2014/main" id="{B506BCC9-5AC7-4C51-B3D0-C0331E43937B}"/>
               </a:ext>
             </a:extLst>
           </p:cNvPr>
@@ -11682,7 +11882,7 @@
     </p:spTree>
     <p:extLst>
       <p:ext uri="{BB962C8B-B14F-4D97-AF65-F5344CB8AC3E}">
-        <p14:creationId xmlns:p14="http://schemas.microsoft.com/office/powerpoint/2010/main" val="1708140495"/>
+        <p14:creationId xmlns:p14="http://schemas.microsoft.com/office/powerpoint/2010/main" val="530445009"/>
       </p:ext>
     </p:extLst>
   </p:cSld>
@@ -11837,7 +12037,7 @@
           <p:cNvPr id="23" name="">
             <a:extLst xmlns:a="http://schemas.openxmlformats.org/drawingml/2006/main">
               <a:ext uri="{FF2B5EF4-FFF2-40B4-BE49-F238E27FC236}">
-                <a16:creationId xmlns:a16="http://schemas.microsoft.com/office/drawing/2014/main" id="{22C9D854-F745-4E4F-9689-6249862283DA}"/>
+                <a16:creationId xmlns:a16="http://schemas.microsoft.com/office/drawing/2014/main" id="{DB1B0F92-8EAE-4C90-9CCB-1273AC96C74A}"/>
               </a:ext>
             </a:extLst>
           </p:cNvPr>
@@ -11869,7 +12069,7 @@
           <p:cNvPr id="2" name="">
             <a:extLst xmlns:a="http://schemas.openxmlformats.org/drawingml/2006/main">
               <a:ext uri="{FF2B5EF4-FFF2-40B4-BE49-F238E27FC236}">
-                <a16:creationId xmlns:a16="http://schemas.microsoft.com/office/drawing/2014/main" id="{B75495D6-5CFA-4CCD-81EC-F9A679F7EAB8}"/>
+                <a16:creationId xmlns:a16="http://schemas.microsoft.com/office/drawing/2014/main" id="{17D70EDB-E488-4958-829E-C4C9182D2C61}"/>
               </a:ext>
             </a:extLst>
           </p:cNvPr>
@@ -11926,7 +12126,7 @@
           <p:cNvPr id="3" name="">
             <a:extLst xmlns:a="http://schemas.openxmlformats.org/drawingml/2006/main">
               <a:ext uri="{FF2B5EF4-FFF2-40B4-BE49-F238E27FC236}">
-                <a16:creationId xmlns:a16="http://schemas.microsoft.com/office/drawing/2014/main" id="{B5C1D487-0692-4537-9F73-9B023FBED504}"/>
+                <a16:creationId xmlns:a16="http://schemas.microsoft.com/office/drawing/2014/main" id="{13E2D5CA-5771-4178-95B0-6E4F7999BE7C}"/>
               </a:ext>
             </a:extLst>
           </p:cNvPr>
@@ -11958,7 +12158,7 @@
           <p:cNvPr id="4" name="">
             <a:extLst xmlns:a="http://schemas.openxmlformats.org/drawingml/2006/main">
               <a:ext uri="{FF2B5EF4-FFF2-40B4-BE49-F238E27FC236}">
-                <a16:creationId xmlns:a16="http://schemas.microsoft.com/office/drawing/2014/main" id="{D9C6022F-5D26-4CF7-B814-E39B81DBBF9D}"/>
+                <a16:creationId xmlns:a16="http://schemas.microsoft.com/office/drawing/2014/main" id="{34F9EC80-2925-44C6-BE63-D128F25380D0}"/>
               </a:ext>
             </a:extLst>
           </p:cNvPr>
@@ -12015,7 +12215,7 @@
           <p:cNvPr id="5" name="">
             <a:extLst xmlns:a="http://schemas.openxmlformats.org/drawingml/2006/main">
               <a:ext uri="{FF2B5EF4-FFF2-40B4-BE49-F238E27FC236}">
-                <a16:creationId xmlns:a16="http://schemas.microsoft.com/office/drawing/2014/main" id="{E2E5D071-6D54-416B-B2BC-8FAF728B62B7}"/>
+                <a16:creationId xmlns:a16="http://schemas.microsoft.com/office/drawing/2014/main" id="{6FC04761-2700-4212-80E6-ED663B719EC9}"/>
               </a:ext>
             </a:extLst>
           </p:cNvPr>
@@ -12072,7 +12272,7 @@
           <p:cNvPr id="6" name="">
             <a:extLst xmlns:a="http://schemas.openxmlformats.org/drawingml/2006/main">
               <a:ext uri="{FF2B5EF4-FFF2-40B4-BE49-F238E27FC236}">
-                <a16:creationId xmlns:a16="http://schemas.microsoft.com/office/drawing/2014/main" id="{AAD5E1AF-60B1-4810-8925-27BA2CA42E84}"/>
+                <a16:creationId xmlns:a16="http://schemas.microsoft.com/office/drawing/2014/main" id="{C1ACE552-E392-4BBC-8732-0A365734A5DD}"/>
               </a:ext>
             </a:extLst>
           </p:cNvPr>
@@ -12129,7 +12329,7 @@
           <p:cNvPr id="7" name="">
             <a:extLst xmlns:a="http://schemas.openxmlformats.org/drawingml/2006/main">
               <a:ext uri="{FF2B5EF4-FFF2-40B4-BE49-F238E27FC236}">
-                <a16:creationId xmlns:a16="http://schemas.microsoft.com/office/drawing/2014/main" id="{1F058967-804F-487E-A427-106C9D2EB824}"/>
+                <a16:creationId xmlns:a16="http://schemas.microsoft.com/office/drawing/2014/main" id="{52A01421-B4E9-424D-ABAE-97AAEC4FD268}"/>
               </a:ext>
             </a:extLst>
           </p:cNvPr>
@@ -12161,7 +12361,7 @@
           <p:cNvPr id="8" name="">
             <a:extLst xmlns:a="http://schemas.openxmlformats.org/drawingml/2006/main">
               <a:ext uri="{FF2B5EF4-FFF2-40B4-BE49-F238E27FC236}">
-                <a16:creationId xmlns:a16="http://schemas.microsoft.com/office/drawing/2014/main" id="{7B0D6118-1065-4B55-B62B-E7A0AC02904F}"/>
+                <a16:creationId xmlns:a16="http://schemas.microsoft.com/office/drawing/2014/main" id="{1BB300FC-A80E-426C-970F-A660A675B490}"/>
               </a:ext>
             </a:extLst>
           </p:cNvPr>
@@ -12218,7 +12418,7 @@
           <p:cNvPr id="9" name="">
             <a:extLst xmlns:a="http://schemas.openxmlformats.org/drawingml/2006/main">
               <a:ext uri="{FF2B5EF4-FFF2-40B4-BE49-F238E27FC236}">
-                <a16:creationId xmlns:a16="http://schemas.microsoft.com/office/drawing/2014/main" id="{C609B132-E4F6-487C-9D6A-156AEA0D4D80}"/>
+                <a16:creationId xmlns:a16="http://schemas.microsoft.com/office/drawing/2014/main" id="{B4B39BA8-AE43-40D6-A34D-5B0780AE2737}"/>
               </a:ext>
             </a:extLst>
           </p:cNvPr>
@@ -12275,7 +12475,7 @@
           <p:cNvPr id="10" name="">
             <a:extLst xmlns:a="http://schemas.openxmlformats.org/drawingml/2006/main">
               <a:ext uri="{FF2B5EF4-FFF2-40B4-BE49-F238E27FC236}">
-                <a16:creationId xmlns:a16="http://schemas.microsoft.com/office/drawing/2014/main" id="{C57C887F-BC7D-4693-BEB4-CB2B29FCC88C}"/>
+                <a16:creationId xmlns:a16="http://schemas.microsoft.com/office/drawing/2014/main" id="{7483DA6E-4B00-4C13-9F10-8B397DFBC038}"/>
               </a:ext>
             </a:extLst>
           </p:cNvPr>
@@ -12309,7 +12509,7 @@
           <p:cNvPr id="11" name="">
             <a:extLst xmlns:a="http://schemas.openxmlformats.org/drawingml/2006/main">
               <a:ext uri="{FF2B5EF4-FFF2-40B4-BE49-F238E27FC236}">
-                <a16:creationId xmlns:a16="http://schemas.microsoft.com/office/drawing/2014/main" id="{E391636B-21BF-4C09-A957-0ABA7F814ECA}"/>
+                <a16:creationId xmlns:a16="http://schemas.microsoft.com/office/drawing/2014/main" id="{E2F74758-9B9F-484A-A918-369EFA413E2D}"/>
               </a:ext>
             </a:extLst>
           </p:cNvPr>
@@ -12341,7 +12541,7 @@
           <p:cNvPr id="12" name="">
             <a:extLst xmlns:a="http://schemas.openxmlformats.org/drawingml/2006/main">
               <a:ext uri="{FF2B5EF4-FFF2-40B4-BE49-F238E27FC236}">
-                <a16:creationId xmlns:a16="http://schemas.microsoft.com/office/drawing/2014/main" id="{EE495EE9-A8D0-4DA1-B2B6-E71D806E4FB9}"/>
+                <a16:creationId xmlns:a16="http://schemas.microsoft.com/office/drawing/2014/main" id="{72A7C8A9-5E4B-487D-A730-4C71ABD983B7}"/>
               </a:ext>
             </a:extLst>
           </p:cNvPr>
@@ -12398,7 +12598,7 @@
           <p:cNvPr id="13" name="">
             <a:extLst xmlns:a="http://schemas.openxmlformats.org/drawingml/2006/main">
               <a:ext uri="{FF2B5EF4-FFF2-40B4-BE49-F238E27FC236}">
-                <a16:creationId xmlns:a16="http://schemas.microsoft.com/office/drawing/2014/main" id="{7B877FD9-1080-4FF8-8E8B-7404BE1D20BB}"/>
+                <a16:creationId xmlns:a16="http://schemas.microsoft.com/office/drawing/2014/main" id="{F36024EF-B1DA-42B7-AD1E-EC8C65949296}"/>
               </a:ext>
             </a:extLst>
           </p:cNvPr>
@@ -12455,7 +12655,7 @@
           <p:cNvPr id="14" name="">
             <a:extLst xmlns:a="http://schemas.openxmlformats.org/drawingml/2006/main">
               <a:ext uri="{FF2B5EF4-FFF2-40B4-BE49-F238E27FC236}">
-                <a16:creationId xmlns:a16="http://schemas.microsoft.com/office/drawing/2014/main" id="{9A1B6C6C-34C9-44DE-A07E-2143E01A7F42}"/>
+                <a16:creationId xmlns:a16="http://schemas.microsoft.com/office/drawing/2014/main" id="{9EE0F7AE-AC01-4BE9-9A58-3544BC5797FA}"/>
               </a:ext>
             </a:extLst>
           </p:cNvPr>
@@ -12489,7 +12689,7 @@
           <p:cNvPr id="15" name="">
             <a:extLst xmlns:a="http://schemas.openxmlformats.org/drawingml/2006/main">
               <a:ext uri="{FF2B5EF4-FFF2-40B4-BE49-F238E27FC236}">
-                <a16:creationId xmlns:a16="http://schemas.microsoft.com/office/drawing/2014/main" id="{00427C54-E984-42EE-AE62-1E21F267A094}"/>
+                <a16:creationId xmlns:a16="http://schemas.microsoft.com/office/drawing/2014/main" id="{F78D148E-2FD4-4C43-8263-09BAD42FA932}"/>
               </a:ext>
             </a:extLst>
           </p:cNvPr>
@@ -12521,7 +12721,7 @@
           <p:cNvPr id="16" name="">
             <a:extLst xmlns:a="http://schemas.openxmlformats.org/drawingml/2006/main">
               <a:ext uri="{FF2B5EF4-FFF2-40B4-BE49-F238E27FC236}">
-                <a16:creationId xmlns:a16="http://schemas.microsoft.com/office/drawing/2014/main" id="{910FDF2A-0B44-43FE-B209-D1A3DF68354B}"/>
+                <a16:creationId xmlns:a16="http://schemas.microsoft.com/office/drawing/2014/main" id="{FBE520D8-DCDB-4839-BAEC-6E5799A8465C}"/>
               </a:ext>
             </a:extLst>
           </p:cNvPr>
@@ -12578,7 +12778,7 @@
           <p:cNvPr id="17" name="">
             <a:extLst xmlns:a="http://schemas.openxmlformats.org/drawingml/2006/main">
               <a:ext uri="{FF2B5EF4-FFF2-40B4-BE49-F238E27FC236}">
-                <a16:creationId xmlns:a16="http://schemas.microsoft.com/office/drawing/2014/main" id="{7C90F82D-1CE6-464E-984E-D2209852D4F9}"/>
+                <a16:creationId xmlns:a16="http://schemas.microsoft.com/office/drawing/2014/main" id="{DBE6AB54-B463-4D09-ABD7-87747B19D43E}"/>
               </a:ext>
             </a:extLst>
           </p:cNvPr>
@@ -12635,7 +12835,7 @@
           <p:cNvPr id="18" name="">
             <a:extLst xmlns:a="http://schemas.openxmlformats.org/drawingml/2006/main">
               <a:ext uri="{FF2B5EF4-FFF2-40B4-BE49-F238E27FC236}">
-                <a16:creationId xmlns:a16="http://schemas.microsoft.com/office/drawing/2014/main" id="{2F66B6AB-4BBD-432B-90A8-7F141FDFB200}"/>
+                <a16:creationId xmlns:a16="http://schemas.microsoft.com/office/drawing/2014/main" id="{CC1A1AF5-A877-4888-B42C-46170B5DFD7F}"/>
               </a:ext>
             </a:extLst>
           </p:cNvPr>
@@ -12669,7 +12869,7 @@
           <p:cNvPr id="19" name="">
             <a:extLst xmlns:a="http://schemas.openxmlformats.org/drawingml/2006/main">
               <a:ext uri="{FF2B5EF4-FFF2-40B4-BE49-F238E27FC236}">
-                <a16:creationId xmlns:a16="http://schemas.microsoft.com/office/drawing/2014/main" id="{EADD3DE3-7632-4BE8-8BC7-652D745E4A90}"/>
+                <a16:creationId xmlns:a16="http://schemas.microsoft.com/office/drawing/2014/main" id="{43F31E0E-48C1-4DC0-8395-D42850FE4847}"/>
               </a:ext>
             </a:extLst>
           </p:cNvPr>
@@ -12701,7 +12901,7 @@
           <p:cNvPr id="20" name="">
             <a:extLst xmlns:a="http://schemas.openxmlformats.org/drawingml/2006/main">
               <a:ext uri="{FF2B5EF4-FFF2-40B4-BE49-F238E27FC236}">
-                <a16:creationId xmlns:a16="http://schemas.microsoft.com/office/drawing/2014/main" id="{8C85D74C-9993-4151-97D3-F390F1048D90}"/>
+                <a16:creationId xmlns:a16="http://schemas.microsoft.com/office/drawing/2014/main" id="{C3F71D58-5A83-4B8F-B19C-AD8B11635584}"/>
               </a:ext>
             </a:extLst>
           </p:cNvPr>
@@ -12758,7 +12958,7 @@
           <p:cNvPr id="21" name="">
             <a:extLst xmlns:a="http://schemas.openxmlformats.org/drawingml/2006/main">
               <a:ext uri="{FF2B5EF4-FFF2-40B4-BE49-F238E27FC236}">
-                <a16:creationId xmlns:a16="http://schemas.microsoft.com/office/drawing/2014/main" id="{ED853077-90FB-4E28-BA14-41500A4A88FF}"/>
+                <a16:creationId xmlns:a16="http://schemas.microsoft.com/office/drawing/2014/main" id="{42A055AA-28BF-4356-8CE0-0024DEC9102C}"/>
               </a:ext>
             </a:extLst>
           </p:cNvPr>
@@ -12815,7 +13015,7 @@
           <p:cNvPr id="22" name="">
             <a:extLst xmlns:a="http://schemas.openxmlformats.org/drawingml/2006/main">
               <a:ext uri="{FF2B5EF4-FFF2-40B4-BE49-F238E27FC236}">
-                <a16:creationId xmlns:a16="http://schemas.microsoft.com/office/drawing/2014/main" id="{E5A7ECEB-FA0E-4D82-8835-90470B6D6DE2}"/>
+                <a16:creationId xmlns:a16="http://schemas.microsoft.com/office/drawing/2014/main" id="{678998C0-4C30-4812-A016-301A47A38C8B}"/>
               </a:ext>
             </a:extLst>
           </p:cNvPr>
@@ -12870,7 +13070,7 @@
     </p:spTree>
     <p:extLst>
       <p:ext uri="{BB962C8B-B14F-4D97-AF65-F5344CB8AC3E}">
-        <p14:creationId xmlns:p14="http://schemas.microsoft.com/office/powerpoint/2010/main" val="412207773"/>
+        <p14:creationId xmlns:p14="http://schemas.microsoft.com/office/powerpoint/2010/main" val="1410034863"/>
       </p:ext>
     </p:extLst>
   </p:cSld>
@@ -13071,7 +13271,7 @@
           <p:cNvPr id="22" name="">
             <a:extLst xmlns:a="http://schemas.openxmlformats.org/drawingml/2006/main">
               <a:ext uri="{FF2B5EF4-FFF2-40B4-BE49-F238E27FC236}">
-                <a16:creationId xmlns:a16="http://schemas.microsoft.com/office/drawing/2014/main" id="{E25F8B53-4CE2-4F33-B836-D5FF44CF0B52}"/>
+                <a16:creationId xmlns:a16="http://schemas.microsoft.com/office/drawing/2014/main" id="{C1FF0081-B45C-4EE5-BDE8-984645C2A1F5}"/>
               </a:ext>
             </a:extLst>
           </p:cNvPr>
@@ -13103,7 +13303,7 @@
           <p:cNvPr id="2" name="">
             <a:extLst xmlns:a="http://schemas.openxmlformats.org/drawingml/2006/main">
               <a:ext uri="{FF2B5EF4-FFF2-40B4-BE49-F238E27FC236}">
-                <a16:creationId xmlns:a16="http://schemas.microsoft.com/office/drawing/2014/main" id="{6B36EBB1-F79C-40D2-8DA9-3645FB3E7FE4}"/>
+                <a16:creationId xmlns:a16="http://schemas.microsoft.com/office/drawing/2014/main" id="{8DEBC517-B68C-4815-9453-7D68BEE0D37E}"/>
               </a:ext>
             </a:extLst>
           </p:cNvPr>
@@ -13160,7 +13360,7 @@
           <p:cNvPr id="3" name="">
             <a:extLst xmlns:a="http://schemas.openxmlformats.org/drawingml/2006/main">
               <a:ext uri="{FF2B5EF4-FFF2-40B4-BE49-F238E27FC236}">
-                <a16:creationId xmlns:a16="http://schemas.microsoft.com/office/drawing/2014/main" id="{69434569-333E-468D-8BBE-D61E001ABCC7}"/>
+                <a16:creationId xmlns:a16="http://schemas.microsoft.com/office/drawing/2014/main" id="{6358AF24-E7F8-44C2-A6AF-810292D4A8B2}"/>
               </a:ext>
             </a:extLst>
           </p:cNvPr>
@@ -13192,7 +13392,7 @@
           <p:cNvPr id="4" name="">
             <a:extLst xmlns:a="http://schemas.openxmlformats.org/drawingml/2006/main">
               <a:ext uri="{FF2B5EF4-FFF2-40B4-BE49-F238E27FC236}">
-                <a16:creationId xmlns:a16="http://schemas.microsoft.com/office/drawing/2014/main" id="{1FD6B679-FEFD-482E-BDE9-0A9F153549E5}"/>
+                <a16:creationId xmlns:a16="http://schemas.microsoft.com/office/drawing/2014/main" id="{09D39CAD-A2A5-4ED2-83EE-D5A15D8EC43B}"/>
               </a:ext>
             </a:extLst>
           </p:cNvPr>
@@ -13249,7 +13449,7 @@
           <p:cNvPr id="5" name="">
             <a:extLst xmlns:a="http://schemas.openxmlformats.org/drawingml/2006/main">
               <a:ext uri="{FF2B5EF4-FFF2-40B4-BE49-F238E27FC236}">
-                <a16:creationId xmlns:a16="http://schemas.microsoft.com/office/drawing/2014/main" id="{079B2F78-A8D3-4EF3-B050-7153B4380260}"/>
+                <a16:creationId xmlns:a16="http://schemas.microsoft.com/office/drawing/2014/main" id="{5874FE4E-0673-41BB-B107-33B2A9F09EB2}"/>
               </a:ext>
             </a:extLst>
           </p:cNvPr>
@@ -13306,7 +13506,7 @@
           <p:cNvPr id="6" name="">
             <a:extLst xmlns:a="http://schemas.openxmlformats.org/drawingml/2006/main">
               <a:ext uri="{FF2B5EF4-FFF2-40B4-BE49-F238E27FC236}">
-                <a16:creationId xmlns:a16="http://schemas.microsoft.com/office/drawing/2014/main" id="{403F950C-0203-4CCD-B48A-F8F85645163B}"/>
+                <a16:creationId xmlns:a16="http://schemas.microsoft.com/office/drawing/2014/main" id="{4AA8E8B0-1CC4-4F59-AECE-D10FBE6EF27D}"/>
               </a:ext>
             </a:extLst>
           </p:cNvPr>
@@ -13363,7 +13563,7 @@
           <p:cNvPr id="7" name="">
             <a:extLst xmlns:a="http://schemas.openxmlformats.org/drawingml/2006/main">
               <a:ext uri="{FF2B5EF4-FFF2-40B4-BE49-F238E27FC236}">
-                <a16:creationId xmlns:a16="http://schemas.microsoft.com/office/drawing/2014/main" id="{F3D50A43-4FA0-43AA-AD36-024C04F0DE39}"/>
+                <a16:creationId xmlns:a16="http://schemas.microsoft.com/office/drawing/2014/main" id="{CADE156C-BBB9-406C-AFD1-685F0BBA2AD3}"/>
               </a:ext>
             </a:extLst>
           </p:cNvPr>
@@ -13395,7 +13595,7 @@
           <p:cNvPr id="8" name="">
             <a:extLst xmlns:a="http://schemas.openxmlformats.org/drawingml/2006/main">
               <a:ext uri="{FF2B5EF4-FFF2-40B4-BE49-F238E27FC236}">
-                <a16:creationId xmlns:a16="http://schemas.microsoft.com/office/drawing/2014/main" id="{2E59FB3C-5C0A-4AB9-AF81-11F9B3ADEAED}"/>
+                <a16:creationId xmlns:a16="http://schemas.microsoft.com/office/drawing/2014/main" id="{A2104E1F-F145-4A9D-880D-552B119B7A47}"/>
               </a:ext>
             </a:extLst>
           </p:cNvPr>
@@ -13452,7 +13652,7 @@
           <p:cNvPr id="9" name="">
             <a:extLst xmlns:a="http://schemas.openxmlformats.org/drawingml/2006/main">
               <a:ext uri="{FF2B5EF4-FFF2-40B4-BE49-F238E27FC236}">
-                <a16:creationId xmlns:a16="http://schemas.microsoft.com/office/drawing/2014/main" id="{6F1742C4-6E34-4056-835D-448498553A08}"/>
+                <a16:creationId xmlns:a16="http://schemas.microsoft.com/office/drawing/2014/main" id="{AFF4F08D-90EA-4F21-8F4F-1C7757792333}"/>
               </a:ext>
             </a:extLst>
           </p:cNvPr>
@@ -13509,7 +13709,7 @@
           <p:cNvPr id="10" name="">
             <a:extLst xmlns:a="http://schemas.openxmlformats.org/drawingml/2006/main">
               <a:ext uri="{FF2B5EF4-FFF2-40B4-BE49-F238E27FC236}">
-                <a16:creationId xmlns:a16="http://schemas.microsoft.com/office/drawing/2014/main" id="{D27D65A1-5EB8-4ECA-9DFE-9851F65DF86A}"/>
+                <a16:creationId xmlns:a16="http://schemas.microsoft.com/office/drawing/2014/main" id="{6B2556F2-61DB-41C8-97B8-51757F10C777}"/>
               </a:ext>
             </a:extLst>
           </p:cNvPr>
@@ -13543,7 +13743,7 @@
           <p:cNvPr id="11" name="">
             <a:extLst xmlns:a="http://schemas.openxmlformats.org/drawingml/2006/main">
               <a:ext uri="{FF2B5EF4-FFF2-40B4-BE49-F238E27FC236}">
-                <a16:creationId xmlns:a16="http://schemas.microsoft.com/office/drawing/2014/main" id="{FD196B09-2AC4-4564-89A7-68A215D6EC3B}"/>
+                <a16:creationId xmlns:a16="http://schemas.microsoft.com/office/drawing/2014/main" id="{3CB9C7FC-19CB-4F57-9DA7-2E1EDBFF2116}"/>
               </a:ext>
             </a:extLst>
           </p:cNvPr>
@@ -13575,7 +13775,7 @@
           <p:cNvPr id="12" name="">
             <a:extLst xmlns:a="http://schemas.openxmlformats.org/drawingml/2006/main">
               <a:ext uri="{FF2B5EF4-FFF2-40B4-BE49-F238E27FC236}">
-                <a16:creationId xmlns:a16="http://schemas.microsoft.com/office/drawing/2014/main" id="{804F1AEC-164D-421D-87F0-8D1EB0359926}"/>
+                <a16:creationId xmlns:a16="http://schemas.microsoft.com/office/drawing/2014/main" id="{8F5D1087-2C3E-48B9-8966-CF3A8490364E}"/>
               </a:ext>
             </a:extLst>
           </p:cNvPr>
@@ -13632,7 +13832,7 @@
           <p:cNvPr id="13" name="">
             <a:extLst xmlns:a="http://schemas.openxmlformats.org/drawingml/2006/main">
               <a:ext uri="{FF2B5EF4-FFF2-40B4-BE49-F238E27FC236}">
-                <a16:creationId xmlns:a16="http://schemas.microsoft.com/office/drawing/2014/main" id="{1983F492-45AD-4E25-B934-52773F7AFC2C}"/>
+                <a16:creationId xmlns:a16="http://schemas.microsoft.com/office/drawing/2014/main" id="{9B3B5E83-F460-40FD-A87E-3B66D19C5900}"/>
               </a:ext>
             </a:extLst>
           </p:cNvPr>
@@ -13689,7 +13889,7 @@
           <p:cNvPr id="14" name="">
             <a:extLst xmlns:a="http://schemas.openxmlformats.org/drawingml/2006/main">
               <a:ext uri="{FF2B5EF4-FFF2-40B4-BE49-F238E27FC236}">
-                <a16:creationId xmlns:a16="http://schemas.microsoft.com/office/drawing/2014/main" id="{9F6B1F9A-1D14-4952-B3EC-59714D37B89A}"/>
+                <a16:creationId xmlns:a16="http://schemas.microsoft.com/office/drawing/2014/main" id="{6A3C3830-B16E-4DA9-AE5B-7D79D4045DCA}"/>
               </a:ext>
             </a:extLst>
           </p:cNvPr>
@@ -13723,7 +13923,7 @@
           <p:cNvPr id="15" name="">
             <a:extLst xmlns:a="http://schemas.openxmlformats.org/drawingml/2006/main">
               <a:ext uri="{FF2B5EF4-FFF2-40B4-BE49-F238E27FC236}">
-                <a16:creationId xmlns:a16="http://schemas.microsoft.com/office/drawing/2014/main" id="{83123B8C-FC9C-46BB-A75C-AFEAA7EC1B60}"/>
+                <a16:creationId xmlns:a16="http://schemas.microsoft.com/office/drawing/2014/main" id="{A1B8AE3C-4BA7-475F-BC40-29F27A81EFFF}"/>
               </a:ext>
             </a:extLst>
           </p:cNvPr>
@@ -13755,7 +13955,7 @@
           <p:cNvPr id="16" name="">
             <a:extLst xmlns:a="http://schemas.openxmlformats.org/drawingml/2006/main">
               <a:ext uri="{FF2B5EF4-FFF2-40B4-BE49-F238E27FC236}">
-                <a16:creationId xmlns:a16="http://schemas.microsoft.com/office/drawing/2014/main" id="{E02C1A52-F369-4B8F-BD10-2D42E71AE855}"/>
+                <a16:creationId xmlns:a16="http://schemas.microsoft.com/office/drawing/2014/main" id="{81C4C6E9-66C5-4C2D-AEFE-EBE0F4424557}"/>
               </a:ext>
             </a:extLst>
           </p:cNvPr>
@@ -13812,7 +14012,7 @@
           <p:cNvPr id="17" name="">
             <a:extLst xmlns:a="http://schemas.openxmlformats.org/drawingml/2006/main">
               <a:ext uri="{FF2B5EF4-FFF2-40B4-BE49-F238E27FC236}">
-                <a16:creationId xmlns:a16="http://schemas.microsoft.com/office/drawing/2014/main" id="{F44BD748-1043-4F94-8B03-83826DC0D013}"/>
+                <a16:creationId xmlns:a16="http://schemas.microsoft.com/office/drawing/2014/main" id="{9B1C5699-8393-49EC-8C37-7BACABA98F77}"/>
               </a:ext>
             </a:extLst>
           </p:cNvPr>
@@ -13869,7 +14069,7 @@
           <p:cNvPr id="18" name="">
             <a:extLst xmlns:a="http://schemas.openxmlformats.org/drawingml/2006/main">
               <a:ext uri="{FF2B5EF4-FFF2-40B4-BE49-F238E27FC236}">
-                <a16:creationId xmlns:a16="http://schemas.microsoft.com/office/drawing/2014/main" id="{21229E28-05EC-42C4-B8AD-834E352D216B}"/>
+                <a16:creationId xmlns:a16="http://schemas.microsoft.com/office/drawing/2014/main" id="{27137CA1-297B-4AFD-B9C4-286AADD18D4C}"/>
               </a:ext>
             </a:extLst>
           </p:cNvPr>
@@ -13903,7 +14103,7 @@
           <p:cNvPr id="19" name="">
             <a:extLst xmlns:a="http://schemas.openxmlformats.org/drawingml/2006/main">
               <a:ext uri="{FF2B5EF4-FFF2-40B4-BE49-F238E27FC236}">
-                <a16:creationId xmlns:a16="http://schemas.microsoft.com/office/drawing/2014/main" id="{DC48B14F-0FC3-4A0C-BC6F-5D3E343F4C16}"/>
+                <a16:creationId xmlns:a16="http://schemas.microsoft.com/office/drawing/2014/main" id="{5F22379F-C359-49AC-96C3-C23D8D823430}"/>
               </a:ext>
             </a:extLst>
           </p:cNvPr>
@@ -13935,7 +14135,7 @@
           <p:cNvPr id="20" name="">
             <a:extLst xmlns:a="http://schemas.openxmlformats.org/drawingml/2006/main">
               <a:ext uri="{FF2B5EF4-FFF2-40B4-BE49-F238E27FC236}">
-                <a16:creationId xmlns:a16="http://schemas.microsoft.com/office/drawing/2014/main" id="{67444BC7-163B-4C02-A13F-8ED30541EA5C}"/>
+                <a16:creationId xmlns:a16="http://schemas.microsoft.com/office/drawing/2014/main" id="{309CAEC3-6FD9-45B5-B8BA-AA57EC2CE977}"/>
               </a:ext>
             </a:extLst>
           </p:cNvPr>
@@ -13992,7 +14192,7 @@
           <p:cNvPr id="21" name="">
             <a:extLst xmlns:a="http://schemas.openxmlformats.org/drawingml/2006/main">
               <a:ext uri="{FF2B5EF4-FFF2-40B4-BE49-F238E27FC236}">
-                <a16:creationId xmlns:a16="http://schemas.microsoft.com/office/drawing/2014/main" id="{C8900B0D-2C5B-4F7A-82B0-5AE11A82607F}"/>
+                <a16:creationId xmlns:a16="http://schemas.microsoft.com/office/drawing/2014/main" id="{4D12DA56-31BB-4A15-8262-87E32F4510F9}"/>
               </a:ext>
             </a:extLst>
           </p:cNvPr>
@@ -14047,7 +14247,7 @@
     </p:spTree>
     <p:extLst>
       <p:ext uri="{BB962C8B-B14F-4D97-AF65-F5344CB8AC3E}">
-        <p14:creationId xmlns:p14="http://schemas.microsoft.com/office/powerpoint/2010/main" val="916242071"/>
+        <p14:creationId xmlns:p14="http://schemas.microsoft.com/office/powerpoint/2010/main" val="846222579"/>
       </p:ext>
     </p:extLst>
   </p:cSld>
